--- a/青年聖歌II/(青年聖歌II73)每步跟隨主.pptx
+++ b/青年聖歌II/(青年聖歌II73)每步跟隨主.pptx
@@ -171,7 +171,7 @@
           <a:lstStyle/>
           <a:p>
             <a:r>
-              <a:rPr lang="en-US" altLang="zh-TW" smtClean="0"/>
+              <a:rPr lang="en-US" altLang="zh-TW"/>
               <a:t>Click to edit Master title style</a:t>
             </a:r>
             <a:endParaRPr lang="zh-TW" altLang="en-US"/>
@@ -290,7 +290,7 @@
           </a:lstStyle>
           <a:p>
             <a:r>
-              <a:rPr lang="en-US" altLang="zh-TW" smtClean="0"/>
+              <a:rPr lang="en-US" altLang="zh-TW"/>
               <a:t>Click to edit Master subtitle style</a:t>
             </a:r>
             <a:endParaRPr lang="zh-TW" altLang="en-US"/>
@@ -314,7 +314,7 @@
           <a:p>
             <a:fld id="{4C49ED7A-AD43-4227-9CF8-7297730BF5EE}" type="datetimeFigureOut">
               <a:rPr lang="vi-VN" smtClean="0"/>
-              <a:t>19/11/2021</a:t>
+              <a:t>24/05/2025</a:t>
             </a:fld>
             <a:endParaRPr lang="vi-VN"/>
           </a:p>
@@ -408,7 +408,7 @@
           <a:lstStyle/>
           <a:p>
             <a:r>
-              <a:rPr lang="en-US" altLang="zh-TW" smtClean="0"/>
+              <a:rPr lang="en-US" altLang="zh-TW"/>
               <a:t>Click to edit Master title style</a:t>
             </a:r>
             <a:endParaRPr lang="zh-TW" altLang="en-US"/>
@@ -432,35 +432,35 @@
           <a:p>
             <a:pPr lvl="0"/>
             <a:r>
-              <a:rPr lang="en-US" altLang="zh-TW" smtClean="0"/>
+              <a:rPr lang="en-US" altLang="zh-TW"/>
               <a:t>Edit Master text styles</a:t>
             </a:r>
           </a:p>
           <a:p>
             <a:pPr lvl="1"/>
             <a:r>
-              <a:rPr lang="en-US" altLang="zh-TW" smtClean="0"/>
+              <a:rPr lang="en-US" altLang="zh-TW"/>
               <a:t>Second level</a:t>
             </a:r>
           </a:p>
           <a:p>
             <a:pPr lvl="2"/>
             <a:r>
-              <a:rPr lang="en-US" altLang="zh-TW" smtClean="0"/>
+              <a:rPr lang="en-US" altLang="zh-TW"/>
               <a:t>Third level</a:t>
             </a:r>
           </a:p>
           <a:p>
             <a:pPr lvl="3"/>
             <a:r>
-              <a:rPr lang="en-US" altLang="zh-TW" smtClean="0"/>
+              <a:rPr lang="en-US" altLang="zh-TW"/>
               <a:t>Fourth level</a:t>
             </a:r>
           </a:p>
           <a:p>
             <a:pPr lvl="4"/>
             <a:r>
-              <a:rPr lang="en-US" altLang="zh-TW" smtClean="0"/>
+              <a:rPr lang="en-US" altLang="zh-TW"/>
               <a:t>Fifth level</a:t>
             </a:r>
             <a:endParaRPr lang="zh-TW" altLang="en-US"/>
@@ -484,7 +484,7 @@
           <a:p>
             <a:fld id="{4C49ED7A-AD43-4227-9CF8-7297730BF5EE}" type="datetimeFigureOut">
               <a:rPr lang="vi-VN" smtClean="0"/>
-              <a:t>19/11/2021</a:t>
+              <a:t>24/05/2025</a:t>
             </a:fld>
             <a:endParaRPr lang="vi-VN"/>
           </a:p>
@@ -583,7 +583,7 @@
           <a:lstStyle/>
           <a:p>
             <a:r>
-              <a:rPr lang="en-US" altLang="zh-TW" smtClean="0"/>
+              <a:rPr lang="en-US" altLang="zh-TW"/>
               <a:t>Click to edit Master title style</a:t>
             </a:r>
             <a:endParaRPr lang="zh-TW" altLang="en-US"/>
@@ -612,35 +612,35 @@
           <a:p>
             <a:pPr lvl="0"/>
             <a:r>
-              <a:rPr lang="en-US" altLang="zh-TW" smtClean="0"/>
+              <a:rPr lang="en-US" altLang="zh-TW"/>
               <a:t>Edit Master text styles</a:t>
             </a:r>
           </a:p>
           <a:p>
             <a:pPr lvl="1"/>
             <a:r>
-              <a:rPr lang="en-US" altLang="zh-TW" smtClean="0"/>
+              <a:rPr lang="en-US" altLang="zh-TW"/>
               <a:t>Second level</a:t>
             </a:r>
           </a:p>
           <a:p>
             <a:pPr lvl="2"/>
             <a:r>
-              <a:rPr lang="en-US" altLang="zh-TW" smtClean="0"/>
+              <a:rPr lang="en-US" altLang="zh-TW"/>
               <a:t>Third level</a:t>
             </a:r>
           </a:p>
           <a:p>
             <a:pPr lvl="3"/>
             <a:r>
-              <a:rPr lang="en-US" altLang="zh-TW" smtClean="0"/>
+              <a:rPr lang="en-US" altLang="zh-TW"/>
               <a:t>Fourth level</a:t>
             </a:r>
           </a:p>
           <a:p>
             <a:pPr lvl="4"/>
             <a:r>
-              <a:rPr lang="en-US" altLang="zh-TW" smtClean="0"/>
+              <a:rPr lang="en-US" altLang="zh-TW"/>
               <a:t>Fifth level</a:t>
             </a:r>
             <a:endParaRPr lang="zh-TW" altLang="en-US"/>
@@ -664,7 +664,7 @@
           <a:p>
             <a:fld id="{4C49ED7A-AD43-4227-9CF8-7297730BF5EE}" type="datetimeFigureOut">
               <a:rPr lang="vi-VN" smtClean="0"/>
-              <a:t>19/11/2021</a:t>
+              <a:t>24/05/2025</a:t>
             </a:fld>
             <a:endParaRPr lang="vi-VN"/>
           </a:p>
@@ -758,7 +758,7 @@
           <a:lstStyle/>
           <a:p>
             <a:r>
-              <a:rPr lang="en-US" altLang="zh-TW" smtClean="0"/>
+              <a:rPr lang="en-US" altLang="zh-TW"/>
               <a:t>Click to edit Master title style</a:t>
             </a:r>
             <a:endParaRPr lang="zh-TW" altLang="en-US"/>
@@ -782,35 +782,35 @@
           <a:p>
             <a:pPr lvl="0"/>
             <a:r>
-              <a:rPr lang="en-US" altLang="zh-TW" smtClean="0"/>
+              <a:rPr lang="en-US" altLang="zh-TW"/>
               <a:t>Edit Master text styles</a:t>
             </a:r>
           </a:p>
           <a:p>
             <a:pPr lvl="1"/>
             <a:r>
-              <a:rPr lang="en-US" altLang="zh-TW" smtClean="0"/>
+              <a:rPr lang="en-US" altLang="zh-TW"/>
               <a:t>Second level</a:t>
             </a:r>
           </a:p>
           <a:p>
             <a:pPr lvl="2"/>
             <a:r>
-              <a:rPr lang="en-US" altLang="zh-TW" smtClean="0"/>
+              <a:rPr lang="en-US" altLang="zh-TW"/>
               <a:t>Third level</a:t>
             </a:r>
           </a:p>
           <a:p>
             <a:pPr lvl="3"/>
             <a:r>
-              <a:rPr lang="en-US" altLang="zh-TW" smtClean="0"/>
+              <a:rPr lang="en-US" altLang="zh-TW"/>
               <a:t>Fourth level</a:t>
             </a:r>
           </a:p>
           <a:p>
             <a:pPr lvl="4"/>
             <a:r>
-              <a:rPr lang="en-US" altLang="zh-TW" smtClean="0"/>
+              <a:rPr lang="en-US" altLang="zh-TW"/>
               <a:t>Fifth level</a:t>
             </a:r>
             <a:endParaRPr lang="zh-TW" altLang="en-US"/>
@@ -834,7 +834,7 @@
           <a:p>
             <a:fld id="{4C49ED7A-AD43-4227-9CF8-7297730BF5EE}" type="datetimeFigureOut">
               <a:rPr lang="vi-VN" smtClean="0"/>
-              <a:t>19/11/2021</a:t>
+              <a:t>24/05/2025</a:t>
             </a:fld>
             <a:endParaRPr lang="vi-VN"/>
           </a:p>
@@ -937,7 +937,7 @@
           </a:lstStyle>
           <a:p>
             <a:r>
-              <a:rPr lang="en-US" altLang="zh-TW" smtClean="0"/>
+              <a:rPr lang="en-US" altLang="zh-TW"/>
               <a:t>Click to edit Master title style</a:t>
             </a:r>
             <a:endParaRPr lang="zh-TW" altLang="en-US"/>
@@ -1057,7 +1057,7 @@
           <a:p>
             <a:pPr lvl="0"/>
             <a:r>
-              <a:rPr lang="en-US" altLang="zh-TW" smtClean="0"/>
+              <a:rPr lang="en-US" altLang="zh-TW"/>
               <a:t>Edit Master text styles</a:t>
             </a:r>
           </a:p>
@@ -1080,7 +1080,7 @@
           <a:p>
             <a:fld id="{4C49ED7A-AD43-4227-9CF8-7297730BF5EE}" type="datetimeFigureOut">
               <a:rPr lang="vi-VN" smtClean="0"/>
-              <a:t>19/11/2021</a:t>
+              <a:t>24/05/2025</a:t>
             </a:fld>
             <a:endParaRPr lang="vi-VN"/>
           </a:p>
@@ -1174,7 +1174,7 @@
           <a:lstStyle/>
           <a:p>
             <a:r>
-              <a:rPr lang="en-US" altLang="zh-TW" smtClean="0"/>
+              <a:rPr lang="en-US" altLang="zh-TW"/>
               <a:t>Click to edit Master title style</a:t>
             </a:r>
             <a:endParaRPr lang="zh-TW" altLang="en-US"/>
@@ -1231,35 +1231,35 @@
           <a:p>
             <a:pPr lvl="0"/>
             <a:r>
-              <a:rPr lang="en-US" altLang="zh-TW" smtClean="0"/>
+              <a:rPr lang="en-US" altLang="zh-TW"/>
               <a:t>Edit Master text styles</a:t>
             </a:r>
           </a:p>
           <a:p>
             <a:pPr lvl="1"/>
             <a:r>
-              <a:rPr lang="en-US" altLang="zh-TW" smtClean="0"/>
+              <a:rPr lang="en-US" altLang="zh-TW"/>
               <a:t>Second level</a:t>
             </a:r>
           </a:p>
           <a:p>
             <a:pPr lvl="2"/>
             <a:r>
-              <a:rPr lang="en-US" altLang="zh-TW" smtClean="0"/>
+              <a:rPr lang="en-US" altLang="zh-TW"/>
               <a:t>Third level</a:t>
             </a:r>
           </a:p>
           <a:p>
             <a:pPr lvl="3"/>
             <a:r>
-              <a:rPr lang="en-US" altLang="zh-TW" smtClean="0"/>
+              <a:rPr lang="en-US" altLang="zh-TW"/>
               <a:t>Fourth level</a:t>
             </a:r>
           </a:p>
           <a:p>
             <a:pPr lvl="4"/>
             <a:r>
-              <a:rPr lang="en-US" altLang="zh-TW" smtClean="0"/>
+              <a:rPr lang="en-US" altLang="zh-TW"/>
               <a:t>Fifth level</a:t>
             </a:r>
             <a:endParaRPr lang="zh-TW" altLang="en-US"/>
@@ -1316,35 +1316,35 @@
           <a:p>
             <a:pPr lvl="0"/>
             <a:r>
-              <a:rPr lang="en-US" altLang="zh-TW" smtClean="0"/>
+              <a:rPr lang="en-US" altLang="zh-TW"/>
               <a:t>Edit Master text styles</a:t>
             </a:r>
           </a:p>
           <a:p>
             <a:pPr lvl="1"/>
             <a:r>
-              <a:rPr lang="en-US" altLang="zh-TW" smtClean="0"/>
+              <a:rPr lang="en-US" altLang="zh-TW"/>
               <a:t>Second level</a:t>
             </a:r>
           </a:p>
           <a:p>
             <a:pPr lvl="2"/>
             <a:r>
-              <a:rPr lang="en-US" altLang="zh-TW" smtClean="0"/>
+              <a:rPr lang="en-US" altLang="zh-TW"/>
               <a:t>Third level</a:t>
             </a:r>
           </a:p>
           <a:p>
             <a:pPr lvl="3"/>
             <a:r>
-              <a:rPr lang="en-US" altLang="zh-TW" smtClean="0"/>
+              <a:rPr lang="en-US" altLang="zh-TW"/>
               <a:t>Fourth level</a:t>
             </a:r>
           </a:p>
           <a:p>
             <a:pPr lvl="4"/>
             <a:r>
-              <a:rPr lang="en-US" altLang="zh-TW" smtClean="0"/>
+              <a:rPr lang="en-US" altLang="zh-TW"/>
               <a:t>Fifth level</a:t>
             </a:r>
             <a:endParaRPr lang="zh-TW" altLang="en-US"/>
@@ -1368,7 +1368,7 @@
           <a:p>
             <a:fld id="{4C49ED7A-AD43-4227-9CF8-7297730BF5EE}" type="datetimeFigureOut">
               <a:rPr lang="vi-VN" smtClean="0"/>
-              <a:t>19/11/2021</a:t>
+              <a:t>24/05/2025</a:t>
             </a:fld>
             <a:endParaRPr lang="vi-VN"/>
           </a:p>
@@ -1466,7 +1466,7 @@
           </a:lstStyle>
           <a:p>
             <a:r>
-              <a:rPr lang="en-US" altLang="zh-TW" smtClean="0"/>
+              <a:rPr lang="en-US" altLang="zh-TW"/>
               <a:t>Click to edit Master title style</a:t>
             </a:r>
             <a:endParaRPr lang="zh-TW" altLang="en-US"/>
@@ -1532,7 +1532,7 @@
           <a:p>
             <a:pPr lvl="0"/>
             <a:r>
-              <a:rPr lang="en-US" altLang="zh-TW" smtClean="0"/>
+              <a:rPr lang="en-US" altLang="zh-TW"/>
               <a:t>Edit Master text styles</a:t>
             </a:r>
           </a:p>
@@ -1588,35 +1588,35 @@
           <a:p>
             <a:pPr lvl="0"/>
             <a:r>
-              <a:rPr lang="en-US" altLang="zh-TW" smtClean="0"/>
+              <a:rPr lang="en-US" altLang="zh-TW"/>
               <a:t>Edit Master text styles</a:t>
             </a:r>
           </a:p>
           <a:p>
             <a:pPr lvl="1"/>
             <a:r>
-              <a:rPr lang="en-US" altLang="zh-TW" smtClean="0"/>
+              <a:rPr lang="en-US" altLang="zh-TW"/>
               <a:t>Second level</a:t>
             </a:r>
           </a:p>
           <a:p>
             <a:pPr lvl="2"/>
             <a:r>
-              <a:rPr lang="en-US" altLang="zh-TW" smtClean="0"/>
+              <a:rPr lang="en-US" altLang="zh-TW"/>
               <a:t>Third level</a:t>
             </a:r>
           </a:p>
           <a:p>
             <a:pPr lvl="3"/>
             <a:r>
-              <a:rPr lang="en-US" altLang="zh-TW" smtClean="0"/>
+              <a:rPr lang="en-US" altLang="zh-TW"/>
               <a:t>Fourth level</a:t>
             </a:r>
           </a:p>
           <a:p>
             <a:pPr lvl="4"/>
             <a:r>
-              <a:rPr lang="en-US" altLang="zh-TW" smtClean="0"/>
+              <a:rPr lang="en-US" altLang="zh-TW"/>
               <a:t>Fifth level</a:t>
             </a:r>
             <a:endParaRPr lang="zh-TW" altLang="en-US"/>
@@ -1682,7 +1682,7 @@
           <a:p>
             <a:pPr lvl="0"/>
             <a:r>
-              <a:rPr lang="en-US" altLang="zh-TW" smtClean="0"/>
+              <a:rPr lang="en-US" altLang="zh-TW"/>
               <a:t>Edit Master text styles</a:t>
             </a:r>
           </a:p>
@@ -1738,35 +1738,35 @@
           <a:p>
             <a:pPr lvl="0"/>
             <a:r>
-              <a:rPr lang="en-US" altLang="zh-TW" smtClean="0"/>
+              <a:rPr lang="en-US" altLang="zh-TW"/>
               <a:t>Edit Master text styles</a:t>
             </a:r>
           </a:p>
           <a:p>
             <a:pPr lvl="1"/>
             <a:r>
-              <a:rPr lang="en-US" altLang="zh-TW" smtClean="0"/>
+              <a:rPr lang="en-US" altLang="zh-TW"/>
               <a:t>Second level</a:t>
             </a:r>
           </a:p>
           <a:p>
             <a:pPr lvl="2"/>
             <a:r>
-              <a:rPr lang="en-US" altLang="zh-TW" smtClean="0"/>
+              <a:rPr lang="en-US" altLang="zh-TW"/>
               <a:t>Third level</a:t>
             </a:r>
           </a:p>
           <a:p>
             <a:pPr lvl="3"/>
             <a:r>
-              <a:rPr lang="en-US" altLang="zh-TW" smtClean="0"/>
+              <a:rPr lang="en-US" altLang="zh-TW"/>
               <a:t>Fourth level</a:t>
             </a:r>
           </a:p>
           <a:p>
             <a:pPr lvl="4"/>
             <a:r>
-              <a:rPr lang="en-US" altLang="zh-TW" smtClean="0"/>
+              <a:rPr lang="en-US" altLang="zh-TW"/>
               <a:t>Fifth level</a:t>
             </a:r>
             <a:endParaRPr lang="zh-TW" altLang="en-US"/>
@@ -1790,7 +1790,7 @@
           <a:p>
             <a:fld id="{4C49ED7A-AD43-4227-9CF8-7297730BF5EE}" type="datetimeFigureOut">
               <a:rPr lang="vi-VN" smtClean="0"/>
-              <a:t>19/11/2021</a:t>
+              <a:t>24/05/2025</a:t>
             </a:fld>
             <a:endParaRPr lang="vi-VN"/>
           </a:p>
@@ -1884,7 +1884,7 @@
           <a:lstStyle/>
           <a:p>
             <a:r>
-              <a:rPr lang="en-US" altLang="zh-TW" smtClean="0"/>
+              <a:rPr lang="en-US" altLang="zh-TW"/>
               <a:t>Click to edit Master title style</a:t>
             </a:r>
             <a:endParaRPr lang="zh-TW" altLang="en-US"/>
@@ -1908,7 +1908,7 @@
           <a:p>
             <a:fld id="{4C49ED7A-AD43-4227-9CF8-7297730BF5EE}" type="datetimeFigureOut">
               <a:rPr lang="vi-VN" smtClean="0"/>
-              <a:t>19/11/2021</a:t>
+              <a:t>24/05/2025</a:t>
             </a:fld>
             <a:endParaRPr lang="vi-VN"/>
           </a:p>
@@ -2003,7 +2003,7 @@
           <a:p>
             <a:fld id="{4C49ED7A-AD43-4227-9CF8-7297730BF5EE}" type="datetimeFigureOut">
               <a:rPr lang="vi-VN" smtClean="0"/>
-              <a:t>19/11/2021</a:t>
+              <a:t>24/05/2025</a:t>
             </a:fld>
             <a:endParaRPr lang="vi-VN"/>
           </a:p>
@@ -2106,7 +2106,7 @@
           </a:lstStyle>
           <a:p>
             <a:r>
-              <a:rPr lang="en-US" altLang="zh-TW" smtClean="0"/>
+              <a:rPr lang="en-US" altLang="zh-TW"/>
               <a:t>Click to edit Master title style</a:t>
             </a:r>
             <a:endParaRPr lang="zh-TW" altLang="en-US"/>
@@ -2163,35 +2163,35 @@
           <a:p>
             <a:pPr lvl="0"/>
             <a:r>
-              <a:rPr lang="en-US" altLang="zh-TW" smtClean="0"/>
+              <a:rPr lang="en-US" altLang="zh-TW"/>
               <a:t>Edit Master text styles</a:t>
             </a:r>
           </a:p>
           <a:p>
             <a:pPr lvl="1"/>
             <a:r>
-              <a:rPr lang="en-US" altLang="zh-TW" smtClean="0"/>
+              <a:rPr lang="en-US" altLang="zh-TW"/>
               <a:t>Second level</a:t>
             </a:r>
           </a:p>
           <a:p>
             <a:pPr lvl="2"/>
             <a:r>
-              <a:rPr lang="en-US" altLang="zh-TW" smtClean="0"/>
+              <a:rPr lang="en-US" altLang="zh-TW"/>
               <a:t>Third level</a:t>
             </a:r>
           </a:p>
           <a:p>
             <a:pPr lvl="3"/>
             <a:r>
-              <a:rPr lang="en-US" altLang="zh-TW" smtClean="0"/>
+              <a:rPr lang="en-US" altLang="zh-TW"/>
               <a:t>Fourth level</a:t>
             </a:r>
           </a:p>
           <a:p>
             <a:pPr lvl="4"/>
             <a:r>
-              <a:rPr lang="en-US" altLang="zh-TW" smtClean="0"/>
+              <a:rPr lang="en-US" altLang="zh-TW"/>
               <a:t>Fifth level</a:t>
             </a:r>
             <a:endParaRPr lang="zh-TW" altLang="en-US"/>
@@ -2257,7 +2257,7 @@
           <a:p>
             <a:pPr lvl="0"/>
             <a:r>
-              <a:rPr lang="en-US" altLang="zh-TW" smtClean="0"/>
+              <a:rPr lang="en-US" altLang="zh-TW"/>
               <a:t>Edit Master text styles</a:t>
             </a:r>
           </a:p>
@@ -2280,7 +2280,7 @@
           <a:p>
             <a:fld id="{4C49ED7A-AD43-4227-9CF8-7297730BF5EE}" type="datetimeFigureOut">
               <a:rPr lang="vi-VN" smtClean="0"/>
-              <a:t>19/11/2021</a:t>
+              <a:t>24/05/2025</a:t>
             </a:fld>
             <a:endParaRPr lang="vi-VN"/>
           </a:p>
@@ -2383,7 +2383,7 @@
           </a:lstStyle>
           <a:p>
             <a:r>
-              <a:rPr lang="en-US" altLang="zh-TW" smtClean="0"/>
+              <a:rPr lang="en-US" altLang="zh-TW"/>
               <a:t>Click to edit Master title style</a:t>
             </a:r>
             <a:endParaRPr lang="zh-TW" altLang="en-US"/>
@@ -2448,7 +2448,7 @@
           </a:lstStyle>
           <a:p>
             <a:r>
-              <a:rPr lang="en-US" altLang="zh-TW" smtClean="0"/>
+              <a:rPr lang="en-US" altLang="zh-TW"/>
               <a:t>Click icon to add picture</a:t>
             </a:r>
             <a:endParaRPr lang="zh-TW" altLang="en-US"/>
@@ -2514,7 +2514,7 @@
           <a:p>
             <a:pPr lvl="0"/>
             <a:r>
-              <a:rPr lang="en-US" altLang="zh-TW" smtClean="0"/>
+              <a:rPr lang="en-US" altLang="zh-TW"/>
               <a:t>Edit Master text styles</a:t>
             </a:r>
           </a:p>
@@ -2537,7 +2537,7 @@
           <a:p>
             <a:fld id="{4C49ED7A-AD43-4227-9CF8-7297730BF5EE}" type="datetimeFigureOut">
               <a:rPr lang="vi-VN" smtClean="0"/>
-              <a:t>19/11/2021</a:t>
+              <a:t>24/05/2025</a:t>
             </a:fld>
             <a:endParaRPr lang="vi-VN"/>
           </a:p>
@@ -2651,10 +2651,9 @@
           <a:lstStyle/>
           <a:p>
             <a:r>
-              <a:rPr lang="zh-TW" altLang="en-US" smtClean="0"/>
+              <a:rPr lang="zh-TW" altLang="en-US"/>
               <a:t>按一下以編輯母片標題樣式</a:t>
             </a:r>
-            <a:endParaRPr lang="zh-TW" altLang="en-US"/>
           </a:p>
         </p:txBody>
       </p:sp>
@@ -2685,38 +2684,37 @@
           <a:p>
             <a:pPr lvl="0"/>
             <a:r>
-              <a:rPr lang="zh-TW" altLang="en-US" smtClean="0"/>
+              <a:rPr lang="zh-TW" altLang="en-US"/>
               <a:t>按一下以編輯母片文字樣式</a:t>
             </a:r>
           </a:p>
           <a:p>
             <a:pPr lvl="1"/>
             <a:r>
-              <a:rPr lang="zh-TW" altLang="en-US" smtClean="0"/>
+              <a:rPr lang="zh-TW" altLang="en-US"/>
               <a:t>第二層</a:t>
             </a:r>
           </a:p>
           <a:p>
             <a:pPr lvl="2"/>
             <a:r>
-              <a:rPr lang="zh-TW" altLang="en-US" smtClean="0"/>
+              <a:rPr lang="zh-TW" altLang="en-US"/>
               <a:t>第三層</a:t>
             </a:r>
           </a:p>
           <a:p>
             <a:pPr lvl="3"/>
             <a:r>
-              <a:rPr lang="zh-TW" altLang="en-US" smtClean="0"/>
+              <a:rPr lang="zh-TW" altLang="en-US"/>
               <a:t>第四層</a:t>
             </a:r>
           </a:p>
           <a:p>
             <a:pPr lvl="4"/>
             <a:r>
-              <a:rPr lang="zh-TW" altLang="en-US" smtClean="0"/>
+              <a:rPr lang="zh-TW" altLang="en-US"/>
               <a:t>第五層</a:t>
             </a:r>
-            <a:endParaRPr lang="zh-TW" altLang="en-US"/>
           </a:p>
         </p:txBody>
       </p:sp>
@@ -2755,7 +2753,7 @@
           <a:p>
             <a:fld id="{4C49ED7A-AD43-4227-9CF8-7297730BF5EE}" type="datetimeFigureOut">
               <a:rPr lang="vi-VN" smtClean="0"/>
-              <a:t>19/11/2021</a:t>
+              <a:t>24/05/2025</a:t>
             </a:fld>
             <a:endParaRPr lang="vi-VN"/>
           </a:p>
@@ -3299,7 +3297,7 @@
                 </a:solidFill>
                 <a:effectLst/>
               </a:rPr>
-              <a:t>( 2 )</a:t>
+              <a:t>( 2 / 3 )</a:t>
             </a:r>
             <a:endParaRPr lang="vi-VN" sz="4800" b="1" dirty="0">
               <a:solidFill>
@@ -3437,7 +3435,7 @@
                 </a:solidFill>
                 <a:effectLst/>
               </a:rPr>
-              <a:t>( 2 )</a:t>
+              <a:t>( 2 / 3 )</a:t>
             </a:r>
             <a:endParaRPr lang="vi-VN" sz="4800" b="1" dirty="0">
               <a:solidFill>
@@ -3511,59 +3509,7 @@
                 <a:latin typeface="微軟正黑體" pitchFamily="34" charset="-120"/>
                 <a:ea typeface="微軟正黑體" pitchFamily="34" charset="-120"/>
               </a:rPr>
-              <a:t>每步跟隨</a:t>
-            </a:r>
-            <a:r>
-              <a:rPr lang="zh-TW" altLang="en-US" sz="6400" b="1" dirty="0" smtClean="0">
-                <a:solidFill>
-                  <a:srgbClr val="660033"/>
-                </a:solidFill>
-                <a:latin typeface="微軟正黑體" pitchFamily="34" charset="-120"/>
-                <a:ea typeface="微軟正黑體" pitchFamily="34" charset="-120"/>
-              </a:rPr>
-              <a:t>主</a:t>
-            </a:r>
-            <a:endParaRPr lang="en-US" altLang="zh-TW" sz="6400" b="1" dirty="0" smtClean="0">
-              <a:solidFill>
-                <a:srgbClr val="660033"/>
-              </a:solidFill>
-              <a:latin typeface="微軟正黑體" pitchFamily="34" charset="-120"/>
-              <a:ea typeface="微軟正黑體" pitchFamily="34" charset="-120"/>
-            </a:endParaRPr>
-          </a:p>
-          <a:p>
-            <a:pPr algn="ctr">
-              <a:buNone/>
-            </a:pPr>
-            <a:r>
-              <a:rPr lang="zh-TW" altLang="en-US" sz="6400" b="1" dirty="0" smtClean="0">
-                <a:solidFill>
-                  <a:srgbClr val="660033"/>
-                </a:solidFill>
-                <a:latin typeface="微軟正黑體" pitchFamily="34" charset="-120"/>
-                <a:ea typeface="微軟正黑體" pitchFamily="34" charset="-120"/>
-              </a:rPr>
-              <a:t>總</a:t>
-            </a:r>
-            <a:r>
-              <a:rPr lang="zh-TW" altLang="en-US" sz="6400" b="1" dirty="0">
-                <a:solidFill>
-                  <a:srgbClr val="660033"/>
-                </a:solidFill>
-                <a:latin typeface="微軟正黑體" pitchFamily="34" charset="-120"/>
-                <a:ea typeface="微軟正黑體" pitchFamily="34" charset="-120"/>
-              </a:rPr>
-              <a:t>要每步跟隨</a:t>
-            </a:r>
-            <a:r>
-              <a:rPr lang="zh-TW" altLang="en-US" sz="6400" b="1" dirty="0" smtClean="0">
-                <a:solidFill>
-                  <a:srgbClr val="660033"/>
-                </a:solidFill>
-                <a:latin typeface="微軟正黑體" pitchFamily="34" charset="-120"/>
-                <a:ea typeface="微軟正黑體" pitchFamily="34" charset="-120"/>
-              </a:rPr>
-              <a:t>主</a:t>
+              <a:t>每步跟隨主</a:t>
             </a:r>
             <a:endParaRPr lang="en-US" altLang="zh-TW" sz="6400" b="1" dirty="0">
               <a:solidFill>
@@ -3573,70 +3519,26 @@
               <a:ea typeface="微軟正黑體" pitchFamily="34" charset="-120"/>
             </a:endParaRPr>
           </a:p>
-        </p:txBody>
-      </p:sp>
-      <p:sp>
-        <p:nvSpPr>
-          <p:cNvPr id="3" name="TextBox 2"/>
-          <p:cNvSpPr txBox="1"/>
-          <p:nvPr/>
-        </p:nvSpPr>
-        <p:spPr>
-          <a:xfrm>
-            <a:off x="0" y="5061182"/>
-            <a:ext cx="12192000" cy="830997"/>
-          </a:xfrm>
-          <a:prstGeom prst="rect">
-            <a:avLst/>
-          </a:prstGeom>
-          <a:noFill/>
-        </p:spPr>
-        <p:txBody>
-          <a:bodyPr wrap="square" rtlCol="0">
-            <a:spAutoFit/>
-          </a:bodyPr>
-          <a:lstStyle/>
-          <a:p>
-            <a:pPr algn="ctr"/>
-            <a:r>
-              <a:rPr lang="en-US" sz="4800" b="1" dirty="0">
-                <a:solidFill>
-                  <a:srgbClr val="660033"/>
-                </a:solidFill>
-                <a:effectLst/>
-                <a:latin typeface="Microsoft JhengHei" panose="020B0604030504040204" pitchFamily="34" charset="-120"/>
-                <a:ea typeface="Microsoft JhengHei" panose="020B0604030504040204" pitchFamily="34" charset="-120"/>
-              </a:rPr>
-              <a:t>( </a:t>
-            </a:r>
-            <a:r>
-              <a:rPr lang="zh-CN" altLang="en-US" sz="4800" b="1" dirty="0">
-                <a:solidFill>
-                  <a:srgbClr val="660033"/>
-                </a:solidFill>
-                <a:effectLst/>
-                <a:latin typeface="Microsoft JhengHei" panose="020B0604030504040204" pitchFamily="34" charset="-120"/>
-                <a:ea typeface="Microsoft JhengHei" panose="020B0604030504040204" pitchFamily="34" charset="-120"/>
-              </a:rPr>
-              <a:t>副</a:t>
-            </a:r>
-            <a:r>
-              <a:rPr lang="en-US" sz="4800" b="1" dirty="0">
-                <a:solidFill>
-                  <a:srgbClr val="660033"/>
-                </a:solidFill>
-                <a:effectLst/>
-                <a:latin typeface="Microsoft JhengHei" panose="020B0604030504040204" pitchFamily="34" charset="-120"/>
-                <a:ea typeface="Microsoft JhengHei" panose="020B0604030504040204" pitchFamily="34" charset="-120"/>
-              </a:rPr>
-              <a:t> )</a:t>
-            </a:r>
-            <a:endParaRPr lang="vi-VN" sz="4800" b="1" dirty="0">
+          <a:p>
+            <a:pPr algn="ctr">
+              <a:buNone/>
+            </a:pPr>
+            <a:r>
+              <a:rPr lang="zh-TW" altLang="en-US" sz="6400" b="1" dirty="0">
+                <a:solidFill>
+                  <a:srgbClr val="660033"/>
+                </a:solidFill>
+                <a:latin typeface="微軟正黑體" pitchFamily="34" charset="-120"/>
+                <a:ea typeface="微軟正黑體" pitchFamily="34" charset="-120"/>
+              </a:rPr>
+              <a:t>總要每步跟隨主</a:t>
+            </a:r>
+            <a:endParaRPr lang="en-US" altLang="zh-TW" sz="6400" b="1" dirty="0">
               <a:solidFill>
                 <a:srgbClr val="660033"/>
               </a:solidFill>
-              <a:effectLst/>
-              <a:ea typeface="Microsoft JhengHei" panose="020B0604030504040204" pitchFamily="34" charset="-120"/>
+              <a:latin typeface="微軟正黑體" pitchFamily="34" charset="-120"/>
+              <a:ea typeface="微軟正黑體" pitchFamily="34" charset="-120"/>
             </a:endParaRPr>
           </a:p>
         </p:txBody>
@@ -3697,56 +3599,14 @@
               <a:buNone/>
             </a:pPr>
             <a:r>
-              <a:rPr lang="zh-TW" altLang="en-US" sz="6400" b="1" dirty="0" smtClean="0">
+              <a:rPr lang="zh-TW" altLang="en-US" sz="6400" b="1" dirty="0">
                 <a:solidFill>
                   <a:srgbClr val="660033"/>
                 </a:solidFill>
                 <a:latin typeface="微軟正黑體" pitchFamily="34" charset="-120"/>
                 <a:ea typeface="微軟正黑體" pitchFamily="34" charset="-120"/>
               </a:rPr>
-              <a:t>主</a:t>
-            </a:r>
-            <a:r>
-              <a:rPr lang="zh-TW" altLang="en-US" sz="6400" b="1" dirty="0">
-                <a:solidFill>
-                  <a:srgbClr val="660033"/>
-                </a:solidFill>
-                <a:latin typeface="微軟正黑體" pitchFamily="34" charset="-120"/>
-                <a:ea typeface="微軟正黑體" pitchFamily="34" charset="-120"/>
-              </a:rPr>
-              <a:t>要這樣每步引導</a:t>
-            </a:r>
-            <a:r>
-              <a:rPr lang="zh-TW" altLang="en-US" sz="6400" b="1" dirty="0" smtClean="0">
-                <a:solidFill>
-                  <a:srgbClr val="660033"/>
-                </a:solidFill>
-                <a:latin typeface="微軟正黑體" pitchFamily="34" charset="-120"/>
-                <a:ea typeface="微軟正黑體" pitchFamily="34" charset="-120"/>
-              </a:rPr>
-              <a:t>你</a:t>
-            </a:r>
-            <a:endParaRPr lang="en-US" altLang="zh-TW" sz="6400" b="1" dirty="0" smtClean="0">
-              <a:solidFill>
-                <a:srgbClr val="660033"/>
-              </a:solidFill>
-              <a:latin typeface="微軟正黑體" pitchFamily="34" charset="-120"/>
-              <a:ea typeface="微軟正黑體" pitchFamily="34" charset="-120"/>
-            </a:endParaRPr>
-          </a:p>
-          <a:p>
-            <a:pPr algn="ctr">
-              <a:buNone/>
-            </a:pPr>
-            <a:r>
-              <a:rPr lang="zh-TW" altLang="en-US" sz="6400" b="1" dirty="0">
-                <a:solidFill>
-                  <a:srgbClr val="660033"/>
-                </a:solidFill>
-                <a:latin typeface="微軟正黑體" pitchFamily="34" charset="-120"/>
-                <a:ea typeface="微軟正黑體" pitchFamily="34" charset="-120"/>
-              </a:rPr>
-              <a:t>每步跟隨主</a:t>
+              <a:t>主要這樣每步引導你</a:t>
             </a:r>
             <a:endParaRPr lang="en-US" altLang="zh-TW" sz="6400" b="1" dirty="0">
               <a:solidFill>
@@ -3756,70 +3616,26 @@
               <a:ea typeface="微軟正黑體" pitchFamily="34" charset="-120"/>
             </a:endParaRPr>
           </a:p>
-        </p:txBody>
-      </p:sp>
-      <p:sp>
-        <p:nvSpPr>
-          <p:cNvPr id="3" name="TextBox 2"/>
-          <p:cNvSpPr txBox="1"/>
-          <p:nvPr/>
-        </p:nvSpPr>
-        <p:spPr>
-          <a:xfrm>
-            <a:off x="0" y="5061182"/>
-            <a:ext cx="12192000" cy="830997"/>
-          </a:xfrm>
-          <a:prstGeom prst="rect">
-            <a:avLst/>
-          </a:prstGeom>
-          <a:noFill/>
-        </p:spPr>
-        <p:txBody>
-          <a:bodyPr wrap="square" rtlCol="0">
-            <a:spAutoFit/>
-          </a:bodyPr>
-          <a:lstStyle/>
-          <a:p>
-            <a:pPr algn="ctr"/>
-            <a:r>
-              <a:rPr lang="en-US" sz="4800" b="1" dirty="0">
-                <a:solidFill>
-                  <a:srgbClr val="660033"/>
-                </a:solidFill>
-                <a:effectLst/>
-                <a:latin typeface="Microsoft JhengHei" panose="020B0604030504040204" pitchFamily="34" charset="-120"/>
-                <a:ea typeface="Microsoft JhengHei" panose="020B0604030504040204" pitchFamily="34" charset="-120"/>
-              </a:rPr>
-              <a:t>( </a:t>
-            </a:r>
-            <a:r>
-              <a:rPr lang="zh-CN" altLang="en-US" sz="4800" b="1" dirty="0">
-                <a:solidFill>
-                  <a:srgbClr val="660033"/>
-                </a:solidFill>
-                <a:effectLst/>
-                <a:latin typeface="Microsoft JhengHei" panose="020B0604030504040204" pitchFamily="34" charset="-120"/>
-                <a:ea typeface="Microsoft JhengHei" panose="020B0604030504040204" pitchFamily="34" charset="-120"/>
-              </a:rPr>
-              <a:t>副</a:t>
-            </a:r>
-            <a:r>
-              <a:rPr lang="en-US" sz="4800" b="1" dirty="0">
-                <a:solidFill>
-                  <a:srgbClr val="660033"/>
-                </a:solidFill>
-                <a:effectLst/>
-                <a:latin typeface="Microsoft JhengHei" panose="020B0604030504040204" pitchFamily="34" charset="-120"/>
-                <a:ea typeface="Microsoft JhengHei" panose="020B0604030504040204" pitchFamily="34" charset="-120"/>
-              </a:rPr>
-              <a:t> )</a:t>
-            </a:r>
-            <a:endParaRPr lang="vi-VN" sz="4800" b="1" dirty="0">
+          <a:p>
+            <a:pPr algn="ctr">
+              <a:buNone/>
+            </a:pPr>
+            <a:r>
+              <a:rPr lang="zh-TW" altLang="en-US" sz="6400" b="1" dirty="0">
+                <a:solidFill>
+                  <a:srgbClr val="660033"/>
+                </a:solidFill>
+                <a:latin typeface="微軟正黑體" pitchFamily="34" charset="-120"/>
+                <a:ea typeface="微軟正黑體" pitchFamily="34" charset="-120"/>
+              </a:rPr>
+              <a:t>每步跟隨主</a:t>
+            </a:r>
+            <a:endParaRPr lang="en-US" altLang="zh-TW" sz="6400" b="1" dirty="0">
               <a:solidFill>
                 <a:srgbClr val="660033"/>
               </a:solidFill>
-              <a:effectLst/>
-              <a:ea typeface="Microsoft JhengHei" panose="020B0604030504040204" pitchFamily="34" charset="-120"/>
+              <a:latin typeface="微軟正黑體" pitchFamily="34" charset="-120"/>
+              <a:ea typeface="微軟正黑體" pitchFamily="34" charset="-120"/>
             </a:endParaRPr>
           </a:p>
         </p:txBody>
@@ -3880,24 +3696,14 @@
               <a:buNone/>
             </a:pPr>
             <a:r>
-              <a:rPr lang="zh-TW" altLang="en-US" sz="6400" b="1" dirty="0" smtClean="0">
+              <a:rPr lang="zh-TW" altLang="en-US" sz="6400" b="1" dirty="0">
                 <a:solidFill>
                   <a:srgbClr val="660033"/>
                 </a:solidFill>
                 <a:latin typeface="微軟正黑體" pitchFamily="34" charset="-120"/>
                 <a:ea typeface="微軟正黑體" pitchFamily="34" charset="-120"/>
               </a:rPr>
-              <a:t>謹</a:t>
-            </a:r>
-            <a:r>
-              <a:rPr lang="zh-TW" altLang="en-US" sz="6400" b="1" dirty="0">
-                <a:solidFill>
-                  <a:srgbClr val="660033"/>
-                </a:solidFill>
-                <a:latin typeface="微軟正黑體" pitchFamily="34" charset="-120"/>
-                <a:ea typeface="微軟正黑體" pitchFamily="34" charset="-120"/>
-              </a:rPr>
-              <a:t>慎踏上每一步</a:t>
+              <a:t>謹慎踏上每一步</a:t>
             </a:r>
             <a:endParaRPr lang="en-US" altLang="zh-TW" sz="6400" b="1" dirty="0">
               <a:solidFill>
@@ -3927,72 +3733,6 @@
               </a:solidFill>
               <a:latin typeface="微軟正黑體" pitchFamily="34" charset="-120"/>
               <a:ea typeface="微軟正黑體" pitchFamily="34" charset="-120"/>
-            </a:endParaRPr>
-          </a:p>
-        </p:txBody>
-      </p:sp>
-      <p:sp>
-        <p:nvSpPr>
-          <p:cNvPr id="3" name="TextBox 2"/>
-          <p:cNvSpPr txBox="1"/>
-          <p:nvPr/>
-        </p:nvSpPr>
-        <p:spPr>
-          <a:xfrm>
-            <a:off x="0" y="5061182"/>
-            <a:ext cx="12192000" cy="830997"/>
-          </a:xfrm>
-          <a:prstGeom prst="rect">
-            <a:avLst/>
-          </a:prstGeom>
-          <a:noFill/>
-        </p:spPr>
-        <p:txBody>
-          <a:bodyPr wrap="square" rtlCol="0">
-            <a:spAutoFit/>
-          </a:bodyPr>
-          <a:lstStyle/>
-          <a:p>
-            <a:pPr algn="ctr"/>
-            <a:r>
-              <a:rPr lang="en-US" sz="4800" b="1" dirty="0">
-                <a:solidFill>
-                  <a:srgbClr val="660033"/>
-                </a:solidFill>
-                <a:effectLst/>
-                <a:latin typeface="Microsoft JhengHei" panose="020B0604030504040204" pitchFamily="34" charset="-120"/>
-                <a:ea typeface="Microsoft JhengHei" panose="020B0604030504040204" pitchFamily="34" charset="-120"/>
-              </a:rPr>
-              <a:t>( </a:t>
-            </a:r>
-            <a:r>
-              <a:rPr lang="zh-CN" altLang="en-US" sz="4800" b="1" dirty="0">
-                <a:solidFill>
-                  <a:srgbClr val="660033"/>
-                </a:solidFill>
-                <a:effectLst/>
-                <a:latin typeface="Microsoft JhengHei" panose="020B0604030504040204" pitchFamily="34" charset="-120"/>
-                <a:ea typeface="Microsoft JhengHei" panose="020B0604030504040204" pitchFamily="34" charset="-120"/>
-              </a:rPr>
-              <a:t>副</a:t>
-            </a:r>
-            <a:r>
-              <a:rPr lang="en-US" sz="4800" b="1" dirty="0">
-                <a:solidFill>
-                  <a:srgbClr val="660033"/>
-                </a:solidFill>
-                <a:effectLst/>
-                <a:latin typeface="Microsoft JhengHei" panose="020B0604030504040204" pitchFamily="34" charset="-120"/>
-                <a:ea typeface="Microsoft JhengHei" panose="020B0604030504040204" pitchFamily="34" charset="-120"/>
-              </a:rPr>
-              <a:t> )</a:t>
-            </a:r>
-            <a:endParaRPr lang="vi-VN" sz="4800" b="1" dirty="0">
-              <a:solidFill>
-                <a:srgbClr val="660033"/>
-              </a:solidFill>
-              <a:effectLst/>
-              <a:ea typeface="Microsoft JhengHei" panose="020B0604030504040204" pitchFamily="34" charset="-120"/>
             </a:endParaRPr>
           </a:p>
         </p:txBody>
@@ -4094,72 +3834,6 @@
           </a:p>
         </p:txBody>
       </p:sp>
-      <p:sp>
-        <p:nvSpPr>
-          <p:cNvPr id="3" name="TextBox 2"/>
-          <p:cNvSpPr txBox="1"/>
-          <p:nvPr/>
-        </p:nvSpPr>
-        <p:spPr>
-          <a:xfrm>
-            <a:off x="0" y="5061182"/>
-            <a:ext cx="12192000" cy="830997"/>
-          </a:xfrm>
-          <a:prstGeom prst="rect">
-            <a:avLst/>
-          </a:prstGeom>
-          <a:noFill/>
-        </p:spPr>
-        <p:txBody>
-          <a:bodyPr wrap="square" rtlCol="0">
-            <a:spAutoFit/>
-          </a:bodyPr>
-          <a:lstStyle/>
-          <a:p>
-            <a:pPr algn="ctr"/>
-            <a:r>
-              <a:rPr lang="en-US" sz="4800" b="1" dirty="0">
-                <a:solidFill>
-                  <a:srgbClr val="660033"/>
-                </a:solidFill>
-                <a:effectLst/>
-                <a:latin typeface="Microsoft JhengHei" panose="020B0604030504040204" pitchFamily="34" charset="-120"/>
-                <a:ea typeface="Microsoft JhengHei" panose="020B0604030504040204" pitchFamily="34" charset="-120"/>
-              </a:rPr>
-              <a:t>( </a:t>
-            </a:r>
-            <a:r>
-              <a:rPr lang="zh-CN" altLang="en-US" sz="4800" b="1" dirty="0">
-                <a:solidFill>
-                  <a:srgbClr val="660033"/>
-                </a:solidFill>
-                <a:effectLst/>
-                <a:latin typeface="Microsoft JhengHei" panose="020B0604030504040204" pitchFamily="34" charset="-120"/>
-                <a:ea typeface="Microsoft JhengHei" panose="020B0604030504040204" pitchFamily="34" charset="-120"/>
-              </a:rPr>
-              <a:t>副</a:t>
-            </a:r>
-            <a:r>
-              <a:rPr lang="en-US" sz="4800" b="1" dirty="0">
-                <a:solidFill>
-                  <a:srgbClr val="660033"/>
-                </a:solidFill>
-                <a:effectLst/>
-                <a:latin typeface="Microsoft JhengHei" panose="020B0604030504040204" pitchFamily="34" charset="-120"/>
-                <a:ea typeface="Microsoft JhengHei" panose="020B0604030504040204" pitchFamily="34" charset="-120"/>
-              </a:rPr>
-              <a:t> )</a:t>
-            </a:r>
-            <a:endParaRPr lang="vi-VN" sz="4800" b="1" dirty="0">
-              <a:solidFill>
-                <a:srgbClr val="660033"/>
-              </a:solidFill>
-              <a:effectLst/>
-              <a:ea typeface="Microsoft JhengHei" panose="020B0604030504040204" pitchFamily="34" charset="-120"/>
-            </a:endParaRPr>
-          </a:p>
-        </p:txBody>
-      </p:sp>
     </p:spTree>
     <p:extLst>
       <p:ext uri="{BB962C8B-B14F-4D97-AF65-F5344CB8AC3E}">
@@ -4287,7 +3961,7 @@
                 </a:solidFill>
                 <a:effectLst/>
               </a:rPr>
-              <a:t>( 3 )</a:t>
+              <a:t>( 3 / 3 )</a:t>
             </a:r>
             <a:endParaRPr lang="vi-VN" sz="4800" b="1" dirty="0">
               <a:solidFill>
@@ -4425,7 +4099,7 @@
                 </a:solidFill>
                 <a:effectLst/>
               </a:rPr>
-              <a:t>( 3 )</a:t>
+              <a:t>( 3 / 3 )</a:t>
             </a:r>
             <a:endParaRPr lang="vi-VN" sz="4800" b="1" dirty="0">
               <a:solidFill>
@@ -4563,7 +4237,7 @@
                 </a:solidFill>
                 <a:effectLst/>
               </a:rPr>
-              <a:t>( 3 )</a:t>
+              <a:t>( 3 / 3 )</a:t>
             </a:r>
             <a:endParaRPr lang="vi-VN" sz="4800" b="1" dirty="0">
               <a:solidFill>
@@ -4637,59 +4311,7 @@
                 <a:latin typeface="微軟正黑體" pitchFamily="34" charset="-120"/>
                 <a:ea typeface="微軟正黑體" pitchFamily="34" charset="-120"/>
               </a:rPr>
-              <a:t>每步跟隨</a:t>
-            </a:r>
-            <a:r>
-              <a:rPr lang="zh-TW" altLang="en-US" sz="6400" b="1" dirty="0" smtClean="0">
-                <a:solidFill>
-                  <a:srgbClr val="660033"/>
-                </a:solidFill>
-                <a:latin typeface="微軟正黑體" pitchFamily="34" charset="-120"/>
-                <a:ea typeface="微軟正黑體" pitchFamily="34" charset="-120"/>
-              </a:rPr>
-              <a:t>主</a:t>
-            </a:r>
-            <a:endParaRPr lang="en-US" altLang="zh-TW" sz="6400" b="1" dirty="0" smtClean="0">
-              <a:solidFill>
-                <a:srgbClr val="660033"/>
-              </a:solidFill>
-              <a:latin typeface="微軟正黑體" pitchFamily="34" charset="-120"/>
-              <a:ea typeface="微軟正黑體" pitchFamily="34" charset="-120"/>
-            </a:endParaRPr>
-          </a:p>
-          <a:p>
-            <a:pPr algn="ctr">
-              <a:buNone/>
-            </a:pPr>
-            <a:r>
-              <a:rPr lang="zh-TW" altLang="en-US" sz="6400" b="1" dirty="0" smtClean="0">
-                <a:solidFill>
-                  <a:srgbClr val="660033"/>
-                </a:solidFill>
-                <a:latin typeface="微軟正黑體" pitchFamily="34" charset="-120"/>
-                <a:ea typeface="微軟正黑體" pitchFamily="34" charset="-120"/>
-              </a:rPr>
-              <a:t>總</a:t>
-            </a:r>
-            <a:r>
-              <a:rPr lang="zh-TW" altLang="en-US" sz="6400" b="1" dirty="0">
-                <a:solidFill>
-                  <a:srgbClr val="660033"/>
-                </a:solidFill>
-                <a:latin typeface="微軟正黑體" pitchFamily="34" charset="-120"/>
-                <a:ea typeface="微軟正黑體" pitchFamily="34" charset="-120"/>
-              </a:rPr>
-              <a:t>要每步跟隨</a:t>
-            </a:r>
-            <a:r>
-              <a:rPr lang="zh-TW" altLang="en-US" sz="6400" b="1" dirty="0" smtClean="0">
-                <a:solidFill>
-                  <a:srgbClr val="660033"/>
-                </a:solidFill>
-                <a:latin typeface="微軟正黑體" pitchFamily="34" charset="-120"/>
-                <a:ea typeface="微軟正黑體" pitchFamily="34" charset="-120"/>
-              </a:rPr>
-              <a:t>主</a:t>
+              <a:t>每步跟隨主</a:t>
             </a:r>
             <a:endParaRPr lang="en-US" altLang="zh-TW" sz="6400" b="1" dirty="0">
               <a:solidFill>
@@ -4699,70 +4321,26 @@
               <a:ea typeface="微軟正黑體" pitchFamily="34" charset="-120"/>
             </a:endParaRPr>
           </a:p>
-        </p:txBody>
-      </p:sp>
-      <p:sp>
-        <p:nvSpPr>
-          <p:cNvPr id="3" name="TextBox 2"/>
-          <p:cNvSpPr txBox="1"/>
-          <p:nvPr/>
-        </p:nvSpPr>
-        <p:spPr>
-          <a:xfrm>
-            <a:off x="0" y="5061182"/>
-            <a:ext cx="12192000" cy="830997"/>
-          </a:xfrm>
-          <a:prstGeom prst="rect">
-            <a:avLst/>
-          </a:prstGeom>
-          <a:noFill/>
-        </p:spPr>
-        <p:txBody>
-          <a:bodyPr wrap="square" rtlCol="0">
-            <a:spAutoFit/>
-          </a:bodyPr>
-          <a:lstStyle/>
-          <a:p>
-            <a:pPr algn="ctr"/>
-            <a:r>
-              <a:rPr lang="en-US" sz="4800" b="1" dirty="0">
-                <a:solidFill>
-                  <a:srgbClr val="660033"/>
-                </a:solidFill>
-                <a:effectLst/>
-                <a:latin typeface="Microsoft JhengHei" panose="020B0604030504040204" pitchFamily="34" charset="-120"/>
-                <a:ea typeface="Microsoft JhengHei" panose="020B0604030504040204" pitchFamily="34" charset="-120"/>
-              </a:rPr>
-              <a:t>( </a:t>
-            </a:r>
-            <a:r>
-              <a:rPr lang="zh-CN" altLang="en-US" sz="4800" b="1" dirty="0">
-                <a:solidFill>
-                  <a:srgbClr val="660033"/>
-                </a:solidFill>
-                <a:effectLst/>
-                <a:latin typeface="Microsoft JhengHei" panose="020B0604030504040204" pitchFamily="34" charset="-120"/>
-                <a:ea typeface="Microsoft JhengHei" panose="020B0604030504040204" pitchFamily="34" charset="-120"/>
-              </a:rPr>
-              <a:t>副</a:t>
-            </a:r>
-            <a:r>
-              <a:rPr lang="en-US" sz="4800" b="1" dirty="0">
-                <a:solidFill>
-                  <a:srgbClr val="660033"/>
-                </a:solidFill>
-                <a:effectLst/>
-                <a:latin typeface="Microsoft JhengHei" panose="020B0604030504040204" pitchFamily="34" charset="-120"/>
-                <a:ea typeface="Microsoft JhengHei" panose="020B0604030504040204" pitchFamily="34" charset="-120"/>
-              </a:rPr>
-              <a:t> )</a:t>
-            </a:r>
-            <a:endParaRPr lang="vi-VN" sz="4800" b="1" dirty="0">
+          <a:p>
+            <a:pPr algn="ctr">
+              <a:buNone/>
+            </a:pPr>
+            <a:r>
+              <a:rPr lang="zh-TW" altLang="en-US" sz="6400" b="1" dirty="0">
+                <a:solidFill>
+                  <a:srgbClr val="660033"/>
+                </a:solidFill>
+                <a:latin typeface="微軟正黑體" pitchFamily="34" charset="-120"/>
+                <a:ea typeface="微軟正黑體" pitchFamily="34" charset="-120"/>
+              </a:rPr>
+              <a:t>總要每步跟隨主</a:t>
+            </a:r>
+            <a:endParaRPr lang="en-US" altLang="zh-TW" sz="6400" b="1" dirty="0">
               <a:solidFill>
                 <a:srgbClr val="660033"/>
               </a:solidFill>
-              <a:effectLst/>
-              <a:ea typeface="Microsoft JhengHei" panose="020B0604030504040204" pitchFamily="34" charset="-120"/>
+              <a:latin typeface="微軟正黑體" pitchFamily="34" charset="-120"/>
+              <a:ea typeface="微軟正黑體" pitchFamily="34" charset="-120"/>
             </a:endParaRPr>
           </a:p>
         </p:txBody>
@@ -4830,47 +4408,27 @@
                 <a:latin typeface="微軟正黑體" pitchFamily="34" charset="-120"/>
                 <a:ea typeface="微軟正黑體" pitchFamily="34" charset="-120"/>
               </a:rPr>
-              <a:t>主   我要</a:t>
-            </a:r>
-            <a:r>
-              <a:rPr lang="zh-TW" altLang="en-US" sz="6400" b="1" dirty="0" smtClean="0">
+              <a:t>主   我要與</a:t>
+            </a:r>
+            <a:r>
+              <a:rPr lang="zh-CN" altLang="en-US" sz="6400" b="1" dirty="0">
                 <a:solidFill>
                   <a:srgbClr val="660033"/>
                 </a:solidFill>
                 <a:latin typeface="微軟正黑體" pitchFamily="34" charset="-120"/>
                 <a:ea typeface="微軟正黑體" pitchFamily="34" charset="-120"/>
               </a:rPr>
-              <a:t>與</a:t>
-            </a:r>
-            <a:r>
-              <a:rPr lang="zh-CN" altLang="en-US" sz="6400" b="1" dirty="0" smtClean="0">
+              <a:t>祢</a:t>
+            </a:r>
+            <a:r>
+              <a:rPr lang="zh-TW" altLang="en-US" sz="6400" b="1" dirty="0">
                 <a:solidFill>
                   <a:srgbClr val="660033"/>
                 </a:solidFill>
                 <a:latin typeface="微軟正黑體" pitchFamily="34" charset="-120"/>
                 <a:ea typeface="微軟正黑體" pitchFamily="34" charset="-120"/>
               </a:rPr>
-              <a:t>袮</a:t>
-            </a:r>
-            <a:r>
-              <a:rPr lang="zh-TW" altLang="en-US" sz="6400" b="1" dirty="0" smtClean="0">
-                <a:solidFill>
-                  <a:srgbClr val="660033"/>
-                </a:solidFill>
-                <a:latin typeface="微軟正黑體" pitchFamily="34" charset="-120"/>
-                <a:ea typeface="微軟正黑體" pitchFamily="34" charset="-120"/>
-              </a:rPr>
-              <a:t>同</a:t>
-            </a:r>
-            <a:r>
-              <a:rPr lang="zh-TW" altLang="en-US" sz="6400" b="1" dirty="0">
-                <a:solidFill>
-                  <a:srgbClr val="660033"/>
-                </a:solidFill>
-                <a:latin typeface="微軟正黑體" pitchFamily="34" charset="-120"/>
-                <a:ea typeface="微軟正黑體" pitchFamily="34" charset="-120"/>
-              </a:rPr>
-              <a:t>行</a:t>
+              <a:t>同行</a:t>
             </a:r>
             <a:r>
               <a:rPr lang="en-US" altLang="zh-TW" sz="6400" b="1" dirty="0">
@@ -4905,7 +4463,7 @@
               <a:buNone/>
             </a:pPr>
             <a:r>
-              <a:rPr lang="zh-TW" altLang="en-US" sz="6400" b="1" dirty="0" smtClean="0">
+              <a:rPr lang="zh-TW" altLang="en-US" sz="6400" b="1" dirty="0">
                 <a:solidFill>
                   <a:srgbClr val="660033"/>
                 </a:solidFill>
@@ -4922,27 +4480,17 @@
                 <a:latin typeface="微軟正黑體" pitchFamily="34" charset="-120"/>
                 <a:ea typeface="微軟正黑體" pitchFamily="34" charset="-120"/>
               </a:rPr>
-              <a:t>袮</a:t>
-            </a:r>
-            <a:r>
-              <a:rPr lang="zh-TW" altLang="en-US" sz="6400" b="1" dirty="0" smtClean="0">
+              <a:t>祢</a:t>
+            </a:r>
+            <a:r>
+              <a:rPr lang="zh-TW" altLang="en-US" sz="6400" b="1" dirty="0">
                 <a:solidFill>
                   <a:srgbClr val="660033"/>
                 </a:solidFill>
                 <a:latin typeface="微軟正黑體" pitchFamily="34" charset="-120"/>
                 <a:ea typeface="微軟正黑體" pitchFamily="34" charset="-120"/>
               </a:rPr>
-              <a:t>恩</a:t>
-            </a:r>
-            <a:r>
-              <a:rPr lang="zh-TW" altLang="en-US" sz="6400" b="1" dirty="0">
-                <a:solidFill>
-                  <a:srgbClr val="660033"/>
-                </a:solidFill>
-                <a:latin typeface="微軟正黑體" pitchFamily="34" charset="-120"/>
-                <a:ea typeface="微軟正黑體" pitchFamily="34" charset="-120"/>
-              </a:rPr>
-              <a:t>典中陪伴   每一步跟隨</a:t>
+              <a:t>恩典中陪伴   每一步跟隨</a:t>
             </a:r>
             <a:endParaRPr lang="en-US" altLang="zh-TW" sz="6400" b="1" dirty="0">
               <a:solidFill>
@@ -4984,7 +4532,7 @@
                 </a:solidFill>
                 <a:effectLst/>
               </a:rPr>
-              <a:t>( 1 )</a:t>
+              <a:t>( 1 / 3 )</a:t>
             </a:r>
             <a:endParaRPr lang="vi-VN" sz="4800" b="1" dirty="0">
               <a:solidFill>
@@ -5051,56 +4599,14 @@
               <a:buNone/>
             </a:pPr>
             <a:r>
-              <a:rPr lang="zh-TW" altLang="en-US" sz="6400" b="1" dirty="0" smtClean="0">
+              <a:rPr lang="zh-TW" altLang="en-US" sz="6400" b="1" dirty="0">
                 <a:solidFill>
                   <a:srgbClr val="660033"/>
                 </a:solidFill>
                 <a:latin typeface="微軟正黑體" pitchFamily="34" charset="-120"/>
                 <a:ea typeface="微軟正黑體" pitchFamily="34" charset="-120"/>
               </a:rPr>
-              <a:t>主</a:t>
-            </a:r>
-            <a:r>
-              <a:rPr lang="zh-TW" altLang="en-US" sz="6400" b="1" dirty="0">
-                <a:solidFill>
-                  <a:srgbClr val="660033"/>
-                </a:solidFill>
-                <a:latin typeface="微軟正黑體" pitchFamily="34" charset="-120"/>
-                <a:ea typeface="微軟正黑體" pitchFamily="34" charset="-120"/>
-              </a:rPr>
-              <a:t>要這樣每步引導</a:t>
-            </a:r>
-            <a:r>
-              <a:rPr lang="zh-TW" altLang="en-US" sz="6400" b="1" dirty="0" smtClean="0">
-                <a:solidFill>
-                  <a:srgbClr val="660033"/>
-                </a:solidFill>
-                <a:latin typeface="微軟正黑體" pitchFamily="34" charset="-120"/>
-                <a:ea typeface="微軟正黑體" pitchFamily="34" charset="-120"/>
-              </a:rPr>
-              <a:t>你</a:t>
-            </a:r>
-            <a:endParaRPr lang="en-US" altLang="zh-TW" sz="6400" b="1" dirty="0" smtClean="0">
-              <a:solidFill>
-                <a:srgbClr val="660033"/>
-              </a:solidFill>
-              <a:latin typeface="微軟正黑體" pitchFamily="34" charset="-120"/>
-              <a:ea typeface="微軟正黑體" pitchFamily="34" charset="-120"/>
-            </a:endParaRPr>
-          </a:p>
-          <a:p>
-            <a:pPr algn="ctr">
-              <a:buNone/>
-            </a:pPr>
-            <a:r>
-              <a:rPr lang="zh-TW" altLang="en-US" sz="6400" b="1" dirty="0">
-                <a:solidFill>
-                  <a:srgbClr val="660033"/>
-                </a:solidFill>
-                <a:latin typeface="微軟正黑體" pitchFamily="34" charset="-120"/>
-                <a:ea typeface="微軟正黑體" pitchFamily="34" charset="-120"/>
-              </a:rPr>
-              <a:t>每步跟隨主</a:t>
+              <a:t>主要這樣每步引導你</a:t>
             </a:r>
             <a:endParaRPr lang="en-US" altLang="zh-TW" sz="6400" b="1" dirty="0">
               <a:solidFill>
@@ -5110,70 +4616,26 @@
               <a:ea typeface="微軟正黑體" pitchFamily="34" charset="-120"/>
             </a:endParaRPr>
           </a:p>
-        </p:txBody>
-      </p:sp>
-      <p:sp>
-        <p:nvSpPr>
-          <p:cNvPr id="3" name="TextBox 2"/>
-          <p:cNvSpPr txBox="1"/>
-          <p:nvPr/>
-        </p:nvSpPr>
-        <p:spPr>
-          <a:xfrm>
-            <a:off x="0" y="5061182"/>
-            <a:ext cx="12192000" cy="830997"/>
-          </a:xfrm>
-          <a:prstGeom prst="rect">
-            <a:avLst/>
-          </a:prstGeom>
-          <a:noFill/>
-        </p:spPr>
-        <p:txBody>
-          <a:bodyPr wrap="square" rtlCol="0">
-            <a:spAutoFit/>
-          </a:bodyPr>
-          <a:lstStyle/>
-          <a:p>
-            <a:pPr algn="ctr"/>
-            <a:r>
-              <a:rPr lang="en-US" sz="4800" b="1" dirty="0">
-                <a:solidFill>
-                  <a:srgbClr val="660033"/>
-                </a:solidFill>
-                <a:effectLst/>
-                <a:latin typeface="Microsoft JhengHei" panose="020B0604030504040204" pitchFamily="34" charset="-120"/>
-                <a:ea typeface="Microsoft JhengHei" panose="020B0604030504040204" pitchFamily="34" charset="-120"/>
-              </a:rPr>
-              <a:t>( </a:t>
-            </a:r>
-            <a:r>
-              <a:rPr lang="zh-CN" altLang="en-US" sz="4800" b="1" dirty="0">
-                <a:solidFill>
-                  <a:srgbClr val="660033"/>
-                </a:solidFill>
-                <a:effectLst/>
-                <a:latin typeface="Microsoft JhengHei" panose="020B0604030504040204" pitchFamily="34" charset="-120"/>
-                <a:ea typeface="Microsoft JhengHei" panose="020B0604030504040204" pitchFamily="34" charset="-120"/>
-              </a:rPr>
-              <a:t>副</a:t>
-            </a:r>
-            <a:r>
-              <a:rPr lang="en-US" sz="4800" b="1" dirty="0">
-                <a:solidFill>
-                  <a:srgbClr val="660033"/>
-                </a:solidFill>
-                <a:effectLst/>
-                <a:latin typeface="Microsoft JhengHei" panose="020B0604030504040204" pitchFamily="34" charset="-120"/>
-                <a:ea typeface="Microsoft JhengHei" panose="020B0604030504040204" pitchFamily="34" charset="-120"/>
-              </a:rPr>
-              <a:t> )</a:t>
-            </a:r>
-            <a:endParaRPr lang="vi-VN" sz="4800" b="1" dirty="0">
+          <a:p>
+            <a:pPr algn="ctr">
+              <a:buNone/>
+            </a:pPr>
+            <a:r>
+              <a:rPr lang="zh-TW" altLang="en-US" sz="6400" b="1" dirty="0">
+                <a:solidFill>
+                  <a:srgbClr val="660033"/>
+                </a:solidFill>
+                <a:latin typeface="微軟正黑體" pitchFamily="34" charset="-120"/>
+                <a:ea typeface="微軟正黑體" pitchFamily="34" charset="-120"/>
+              </a:rPr>
+              <a:t>每步跟隨主</a:t>
+            </a:r>
+            <a:endParaRPr lang="en-US" altLang="zh-TW" sz="6400" b="1" dirty="0">
               <a:solidFill>
                 <a:srgbClr val="660033"/>
               </a:solidFill>
-              <a:effectLst/>
-              <a:ea typeface="Microsoft JhengHei" panose="020B0604030504040204" pitchFamily="34" charset="-120"/>
+              <a:latin typeface="微軟正黑體" pitchFamily="34" charset="-120"/>
+              <a:ea typeface="微軟正黑體" pitchFamily="34" charset="-120"/>
             </a:endParaRPr>
           </a:p>
         </p:txBody>
@@ -5234,24 +4696,14 @@
               <a:buNone/>
             </a:pPr>
             <a:r>
-              <a:rPr lang="zh-TW" altLang="en-US" sz="6400" b="1" dirty="0" smtClean="0">
+              <a:rPr lang="zh-TW" altLang="en-US" sz="6400" b="1" dirty="0">
                 <a:solidFill>
                   <a:srgbClr val="660033"/>
                 </a:solidFill>
                 <a:latin typeface="微軟正黑體" pitchFamily="34" charset="-120"/>
                 <a:ea typeface="微軟正黑體" pitchFamily="34" charset="-120"/>
               </a:rPr>
-              <a:t>謹</a:t>
-            </a:r>
-            <a:r>
-              <a:rPr lang="zh-TW" altLang="en-US" sz="6400" b="1" dirty="0">
-                <a:solidFill>
-                  <a:srgbClr val="660033"/>
-                </a:solidFill>
-                <a:latin typeface="微軟正黑體" pitchFamily="34" charset="-120"/>
-                <a:ea typeface="微軟正黑體" pitchFamily="34" charset="-120"/>
-              </a:rPr>
-              <a:t>慎踏上每一步</a:t>
+              <a:t>謹慎踏上每一步</a:t>
             </a:r>
             <a:endParaRPr lang="en-US" altLang="zh-TW" sz="6400" b="1" dirty="0">
               <a:solidFill>
@@ -5281,72 +4733,6 @@
               </a:solidFill>
               <a:latin typeface="微軟正黑體" pitchFamily="34" charset="-120"/>
               <a:ea typeface="微軟正黑體" pitchFamily="34" charset="-120"/>
-            </a:endParaRPr>
-          </a:p>
-        </p:txBody>
-      </p:sp>
-      <p:sp>
-        <p:nvSpPr>
-          <p:cNvPr id="3" name="TextBox 2"/>
-          <p:cNvSpPr txBox="1"/>
-          <p:nvPr/>
-        </p:nvSpPr>
-        <p:spPr>
-          <a:xfrm>
-            <a:off x="0" y="5061182"/>
-            <a:ext cx="12192000" cy="830997"/>
-          </a:xfrm>
-          <a:prstGeom prst="rect">
-            <a:avLst/>
-          </a:prstGeom>
-          <a:noFill/>
-        </p:spPr>
-        <p:txBody>
-          <a:bodyPr wrap="square" rtlCol="0">
-            <a:spAutoFit/>
-          </a:bodyPr>
-          <a:lstStyle/>
-          <a:p>
-            <a:pPr algn="ctr"/>
-            <a:r>
-              <a:rPr lang="en-US" sz="4800" b="1" dirty="0">
-                <a:solidFill>
-                  <a:srgbClr val="660033"/>
-                </a:solidFill>
-                <a:effectLst/>
-                <a:latin typeface="Microsoft JhengHei" panose="020B0604030504040204" pitchFamily="34" charset="-120"/>
-                <a:ea typeface="Microsoft JhengHei" panose="020B0604030504040204" pitchFamily="34" charset="-120"/>
-              </a:rPr>
-              <a:t>( </a:t>
-            </a:r>
-            <a:r>
-              <a:rPr lang="zh-CN" altLang="en-US" sz="4800" b="1" dirty="0">
-                <a:solidFill>
-                  <a:srgbClr val="660033"/>
-                </a:solidFill>
-                <a:effectLst/>
-                <a:latin typeface="Microsoft JhengHei" panose="020B0604030504040204" pitchFamily="34" charset="-120"/>
-                <a:ea typeface="Microsoft JhengHei" panose="020B0604030504040204" pitchFamily="34" charset="-120"/>
-              </a:rPr>
-              <a:t>副</a:t>
-            </a:r>
-            <a:r>
-              <a:rPr lang="en-US" sz="4800" b="1" dirty="0">
-                <a:solidFill>
-                  <a:srgbClr val="660033"/>
-                </a:solidFill>
-                <a:effectLst/>
-                <a:latin typeface="Microsoft JhengHei" panose="020B0604030504040204" pitchFamily="34" charset="-120"/>
-                <a:ea typeface="Microsoft JhengHei" panose="020B0604030504040204" pitchFamily="34" charset="-120"/>
-              </a:rPr>
-              <a:t> )</a:t>
-            </a:r>
-            <a:endParaRPr lang="vi-VN" sz="4800" b="1" dirty="0">
-              <a:solidFill>
-                <a:srgbClr val="660033"/>
-              </a:solidFill>
-              <a:effectLst/>
-              <a:ea typeface="Microsoft JhengHei" panose="020B0604030504040204" pitchFamily="34" charset="-120"/>
             </a:endParaRPr>
           </a:p>
         </p:txBody>
@@ -5448,72 +4834,6 @@
           </a:p>
         </p:txBody>
       </p:sp>
-      <p:sp>
-        <p:nvSpPr>
-          <p:cNvPr id="3" name="TextBox 2"/>
-          <p:cNvSpPr txBox="1"/>
-          <p:nvPr/>
-        </p:nvSpPr>
-        <p:spPr>
-          <a:xfrm>
-            <a:off x="0" y="5061182"/>
-            <a:ext cx="12192000" cy="830997"/>
-          </a:xfrm>
-          <a:prstGeom prst="rect">
-            <a:avLst/>
-          </a:prstGeom>
-          <a:noFill/>
-        </p:spPr>
-        <p:txBody>
-          <a:bodyPr wrap="square" rtlCol="0">
-            <a:spAutoFit/>
-          </a:bodyPr>
-          <a:lstStyle/>
-          <a:p>
-            <a:pPr algn="ctr"/>
-            <a:r>
-              <a:rPr lang="en-US" sz="4800" b="1" dirty="0">
-                <a:solidFill>
-                  <a:srgbClr val="660033"/>
-                </a:solidFill>
-                <a:effectLst/>
-                <a:latin typeface="Microsoft JhengHei" panose="020B0604030504040204" pitchFamily="34" charset="-120"/>
-                <a:ea typeface="Microsoft JhengHei" panose="020B0604030504040204" pitchFamily="34" charset="-120"/>
-              </a:rPr>
-              <a:t>( </a:t>
-            </a:r>
-            <a:r>
-              <a:rPr lang="zh-CN" altLang="en-US" sz="4800" b="1" dirty="0">
-                <a:solidFill>
-                  <a:srgbClr val="660033"/>
-                </a:solidFill>
-                <a:effectLst/>
-                <a:latin typeface="Microsoft JhengHei" panose="020B0604030504040204" pitchFamily="34" charset="-120"/>
-                <a:ea typeface="Microsoft JhengHei" panose="020B0604030504040204" pitchFamily="34" charset="-120"/>
-              </a:rPr>
-              <a:t>副</a:t>
-            </a:r>
-            <a:r>
-              <a:rPr lang="en-US" sz="4800" b="1" dirty="0">
-                <a:solidFill>
-                  <a:srgbClr val="660033"/>
-                </a:solidFill>
-                <a:effectLst/>
-                <a:latin typeface="Microsoft JhengHei" panose="020B0604030504040204" pitchFamily="34" charset="-120"/>
-                <a:ea typeface="Microsoft JhengHei" panose="020B0604030504040204" pitchFamily="34" charset="-120"/>
-              </a:rPr>
-              <a:t> )</a:t>
-            </a:r>
-            <a:endParaRPr lang="vi-VN" sz="4800" b="1" dirty="0">
-              <a:solidFill>
-                <a:srgbClr val="660033"/>
-              </a:solidFill>
-              <a:effectLst/>
-              <a:ea typeface="Microsoft JhengHei" panose="020B0604030504040204" pitchFamily="34" charset="-120"/>
-            </a:endParaRPr>
-          </a:p>
-        </p:txBody>
-      </p:sp>
     </p:spTree>
     <p:extLst>
       <p:ext uri="{BB962C8B-B14F-4D97-AF65-F5344CB8AC3E}">
@@ -5577,47 +4897,27 @@
                 <a:latin typeface="微軟正黑體" pitchFamily="34" charset="-120"/>
                 <a:ea typeface="微軟正黑體" pitchFamily="34" charset="-120"/>
               </a:rPr>
-              <a:t>單</a:t>
-            </a:r>
-            <a:r>
-              <a:rPr lang="zh-TW" altLang="en-US" sz="6400" b="1" dirty="0" smtClean="0">
+              <a:t>單要</a:t>
+            </a:r>
+            <a:r>
+              <a:rPr lang="zh-CN" altLang="en-US" sz="6400" b="1" dirty="0">
                 <a:solidFill>
                   <a:srgbClr val="660033"/>
                 </a:solidFill>
                 <a:latin typeface="微軟正黑體" pitchFamily="34" charset="-120"/>
                 <a:ea typeface="微軟正黑體" pitchFamily="34" charset="-120"/>
               </a:rPr>
-              <a:t>要</a:t>
-            </a:r>
-            <a:r>
-              <a:rPr lang="zh-CN" altLang="en-US" sz="6400" b="1" dirty="0">
+              <a:t>祢</a:t>
+            </a:r>
+            <a:r>
+              <a:rPr lang="zh-TW" altLang="en-US" sz="6400" b="1" dirty="0">
                 <a:solidFill>
                   <a:srgbClr val="660033"/>
                 </a:solidFill>
                 <a:latin typeface="微軟正黑體" pitchFamily="34" charset="-120"/>
                 <a:ea typeface="微軟正黑體" pitchFamily="34" charset="-120"/>
               </a:rPr>
-              <a:t>袮</a:t>
-            </a:r>
-            <a:r>
-              <a:rPr lang="zh-TW" altLang="en-US" sz="6400" b="1" dirty="0" smtClean="0">
-                <a:solidFill>
-                  <a:srgbClr val="660033"/>
-                </a:solidFill>
-                <a:latin typeface="微軟正黑體" pitchFamily="34" charset="-120"/>
-                <a:ea typeface="微軟正黑體" pitchFamily="34" charset="-120"/>
-              </a:rPr>
-              <a:t>在</a:t>
-            </a:r>
-            <a:r>
-              <a:rPr lang="zh-TW" altLang="en-US" sz="6400" b="1" dirty="0">
-                <a:solidFill>
-                  <a:srgbClr val="660033"/>
-                </a:solidFill>
-                <a:latin typeface="微軟正黑體" pitchFamily="34" charset="-120"/>
-                <a:ea typeface="微軟正黑體" pitchFamily="34" charset="-120"/>
-              </a:rPr>
-              <a:t>我身旁</a:t>
+              <a:t>在我身旁</a:t>
             </a:r>
             <a:endParaRPr lang="en-US" altLang="zh-TW" sz="6400" b="1" dirty="0">
               <a:solidFill>
@@ -5632,7 +4932,7 @@
               <a:buNone/>
             </a:pPr>
             <a:r>
-              <a:rPr lang="zh-TW" altLang="en-US" sz="6400" b="1" dirty="0" smtClean="0">
+              <a:rPr lang="zh-TW" altLang="en-US" sz="6400" b="1" dirty="0">
                 <a:solidFill>
                   <a:srgbClr val="660033"/>
                 </a:solidFill>
@@ -5649,27 +4949,17 @@
                 <a:latin typeface="微軟正黑體" pitchFamily="34" charset="-120"/>
                 <a:ea typeface="微軟正黑體" pitchFamily="34" charset="-120"/>
               </a:rPr>
-              <a:t>袮</a:t>
-            </a:r>
-            <a:r>
-              <a:rPr lang="zh-TW" altLang="en-US" sz="6400" b="1" dirty="0" smtClean="0">
+              <a:t>祢</a:t>
+            </a:r>
+            <a:r>
+              <a:rPr lang="zh-TW" altLang="en-US" sz="6400" b="1" dirty="0">
                 <a:solidFill>
                   <a:srgbClr val="660033"/>
                 </a:solidFill>
                 <a:latin typeface="微軟正黑體" pitchFamily="34" charset="-120"/>
                 <a:ea typeface="微軟正黑體" pitchFamily="34" charset="-120"/>
               </a:rPr>
-              <a:t>溫</a:t>
-            </a:r>
-            <a:r>
-              <a:rPr lang="zh-TW" altLang="en-US" sz="6400" b="1" dirty="0">
-                <a:solidFill>
-                  <a:srgbClr val="660033"/>
-                </a:solidFill>
-                <a:latin typeface="微軟正黑體" pitchFamily="34" charset="-120"/>
-                <a:ea typeface="微軟正黑體" pitchFamily="34" charset="-120"/>
-              </a:rPr>
-              <a:t>柔慈愛聲</a:t>
+              <a:t>溫柔慈愛聲</a:t>
             </a:r>
             <a:endParaRPr lang="en-US" altLang="zh-TW" sz="6400" b="1" dirty="0">
               <a:solidFill>
@@ -5711,7 +5001,7 @@
                 </a:solidFill>
                 <a:effectLst/>
               </a:rPr>
-              <a:t>( 1 )</a:t>
+              <a:t>( 1 / 3 )</a:t>
             </a:r>
             <a:endParaRPr lang="vi-VN" sz="4800" b="1" dirty="0">
               <a:solidFill>
@@ -5849,7 +5139,7 @@
                 </a:solidFill>
                 <a:effectLst/>
               </a:rPr>
-              <a:t>( 1 )</a:t>
+              <a:t>( 1 / 3 )</a:t>
             </a:r>
             <a:endParaRPr lang="vi-VN" sz="4800" b="1" dirty="0">
               <a:solidFill>
@@ -5923,59 +5213,7 @@
                 <a:latin typeface="微軟正黑體" pitchFamily="34" charset="-120"/>
                 <a:ea typeface="微軟正黑體" pitchFamily="34" charset="-120"/>
               </a:rPr>
-              <a:t>每步跟隨</a:t>
-            </a:r>
-            <a:r>
-              <a:rPr lang="zh-TW" altLang="en-US" sz="6400" b="1" dirty="0" smtClean="0">
-                <a:solidFill>
-                  <a:srgbClr val="660033"/>
-                </a:solidFill>
-                <a:latin typeface="微軟正黑體" pitchFamily="34" charset="-120"/>
-                <a:ea typeface="微軟正黑體" pitchFamily="34" charset="-120"/>
-              </a:rPr>
-              <a:t>主</a:t>
-            </a:r>
-            <a:endParaRPr lang="en-US" altLang="zh-TW" sz="6400" b="1" dirty="0" smtClean="0">
-              <a:solidFill>
-                <a:srgbClr val="660033"/>
-              </a:solidFill>
-              <a:latin typeface="微軟正黑體" pitchFamily="34" charset="-120"/>
-              <a:ea typeface="微軟正黑體" pitchFamily="34" charset="-120"/>
-            </a:endParaRPr>
-          </a:p>
-          <a:p>
-            <a:pPr algn="ctr">
-              <a:buNone/>
-            </a:pPr>
-            <a:r>
-              <a:rPr lang="zh-TW" altLang="en-US" sz="6400" b="1" dirty="0" smtClean="0">
-                <a:solidFill>
-                  <a:srgbClr val="660033"/>
-                </a:solidFill>
-                <a:latin typeface="微軟正黑體" pitchFamily="34" charset="-120"/>
-                <a:ea typeface="微軟正黑體" pitchFamily="34" charset="-120"/>
-              </a:rPr>
-              <a:t>總</a:t>
-            </a:r>
-            <a:r>
-              <a:rPr lang="zh-TW" altLang="en-US" sz="6400" b="1" dirty="0">
-                <a:solidFill>
-                  <a:srgbClr val="660033"/>
-                </a:solidFill>
-                <a:latin typeface="微軟正黑體" pitchFamily="34" charset="-120"/>
-                <a:ea typeface="微軟正黑體" pitchFamily="34" charset="-120"/>
-              </a:rPr>
-              <a:t>要每步跟隨</a:t>
-            </a:r>
-            <a:r>
-              <a:rPr lang="zh-TW" altLang="en-US" sz="6400" b="1" dirty="0" smtClean="0">
-                <a:solidFill>
-                  <a:srgbClr val="660033"/>
-                </a:solidFill>
-                <a:latin typeface="微軟正黑體" pitchFamily="34" charset="-120"/>
-                <a:ea typeface="微軟正黑體" pitchFamily="34" charset="-120"/>
-              </a:rPr>
-              <a:t>主</a:t>
+              <a:t>每步跟隨主</a:t>
             </a:r>
             <a:endParaRPr lang="en-US" altLang="zh-TW" sz="6400" b="1" dirty="0">
               <a:solidFill>
@@ -5985,70 +5223,26 @@
               <a:ea typeface="微軟正黑體" pitchFamily="34" charset="-120"/>
             </a:endParaRPr>
           </a:p>
-        </p:txBody>
-      </p:sp>
-      <p:sp>
-        <p:nvSpPr>
-          <p:cNvPr id="3" name="TextBox 2"/>
-          <p:cNvSpPr txBox="1"/>
-          <p:nvPr/>
-        </p:nvSpPr>
-        <p:spPr>
-          <a:xfrm>
-            <a:off x="0" y="5061182"/>
-            <a:ext cx="12192000" cy="830997"/>
-          </a:xfrm>
-          <a:prstGeom prst="rect">
-            <a:avLst/>
-          </a:prstGeom>
-          <a:noFill/>
-        </p:spPr>
-        <p:txBody>
-          <a:bodyPr wrap="square" rtlCol="0">
-            <a:spAutoFit/>
-          </a:bodyPr>
-          <a:lstStyle/>
-          <a:p>
-            <a:pPr algn="ctr"/>
-            <a:r>
-              <a:rPr lang="en-US" sz="4800" b="1" dirty="0">
-                <a:solidFill>
-                  <a:srgbClr val="660033"/>
-                </a:solidFill>
-                <a:effectLst/>
-                <a:latin typeface="Microsoft JhengHei" panose="020B0604030504040204" pitchFamily="34" charset="-120"/>
-                <a:ea typeface="Microsoft JhengHei" panose="020B0604030504040204" pitchFamily="34" charset="-120"/>
-              </a:rPr>
-              <a:t>( </a:t>
-            </a:r>
-            <a:r>
-              <a:rPr lang="zh-CN" altLang="en-US" sz="4800" b="1" dirty="0">
-                <a:solidFill>
-                  <a:srgbClr val="660033"/>
-                </a:solidFill>
-                <a:effectLst/>
-                <a:latin typeface="Microsoft JhengHei" panose="020B0604030504040204" pitchFamily="34" charset="-120"/>
-                <a:ea typeface="Microsoft JhengHei" panose="020B0604030504040204" pitchFamily="34" charset="-120"/>
-              </a:rPr>
-              <a:t>副</a:t>
-            </a:r>
-            <a:r>
-              <a:rPr lang="en-US" sz="4800" b="1" dirty="0">
-                <a:solidFill>
-                  <a:srgbClr val="660033"/>
-                </a:solidFill>
-                <a:effectLst/>
-                <a:latin typeface="Microsoft JhengHei" panose="020B0604030504040204" pitchFamily="34" charset="-120"/>
-                <a:ea typeface="Microsoft JhengHei" panose="020B0604030504040204" pitchFamily="34" charset="-120"/>
-              </a:rPr>
-              <a:t> )</a:t>
-            </a:r>
-            <a:endParaRPr lang="vi-VN" sz="4800" b="1" dirty="0">
+          <a:p>
+            <a:pPr algn="ctr">
+              <a:buNone/>
+            </a:pPr>
+            <a:r>
+              <a:rPr lang="zh-TW" altLang="en-US" sz="6400" b="1" dirty="0">
+                <a:solidFill>
+                  <a:srgbClr val="660033"/>
+                </a:solidFill>
+                <a:latin typeface="微軟正黑體" pitchFamily="34" charset="-120"/>
+                <a:ea typeface="微軟正黑體" pitchFamily="34" charset="-120"/>
+              </a:rPr>
+              <a:t>總要每步跟隨主</a:t>
+            </a:r>
+            <a:endParaRPr lang="en-US" altLang="zh-TW" sz="6400" b="1" dirty="0">
               <a:solidFill>
                 <a:srgbClr val="660033"/>
               </a:solidFill>
-              <a:effectLst/>
-              <a:ea typeface="Microsoft JhengHei" panose="020B0604030504040204" pitchFamily="34" charset="-120"/>
+              <a:latin typeface="微軟正黑體" pitchFamily="34" charset="-120"/>
+              <a:ea typeface="微軟正黑體" pitchFamily="34" charset="-120"/>
             </a:endParaRPr>
           </a:p>
         </p:txBody>
@@ -6109,56 +5303,14 @@
               <a:buNone/>
             </a:pPr>
             <a:r>
-              <a:rPr lang="zh-TW" altLang="en-US" sz="6400" b="1" dirty="0" smtClean="0">
+              <a:rPr lang="zh-TW" altLang="en-US" sz="6400" b="1" dirty="0">
                 <a:solidFill>
                   <a:srgbClr val="660033"/>
                 </a:solidFill>
                 <a:latin typeface="微軟正黑體" pitchFamily="34" charset="-120"/>
                 <a:ea typeface="微軟正黑體" pitchFamily="34" charset="-120"/>
               </a:rPr>
-              <a:t>主</a:t>
-            </a:r>
-            <a:r>
-              <a:rPr lang="zh-TW" altLang="en-US" sz="6400" b="1" dirty="0">
-                <a:solidFill>
-                  <a:srgbClr val="660033"/>
-                </a:solidFill>
-                <a:latin typeface="微軟正黑體" pitchFamily="34" charset="-120"/>
-                <a:ea typeface="微軟正黑體" pitchFamily="34" charset="-120"/>
-              </a:rPr>
-              <a:t>要這樣每步引導</a:t>
-            </a:r>
-            <a:r>
-              <a:rPr lang="zh-TW" altLang="en-US" sz="6400" b="1" dirty="0" smtClean="0">
-                <a:solidFill>
-                  <a:srgbClr val="660033"/>
-                </a:solidFill>
-                <a:latin typeface="微軟正黑體" pitchFamily="34" charset="-120"/>
-                <a:ea typeface="微軟正黑體" pitchFamily="34" charset="-120"/>
-              </a:rPr>
-              <a:t>你</a:t>
-            </a:r>
-            <a:endParaRPr lang="en-US" altLang="zh-TW" sz="6400" b="1" dirty="0" smtClean="0">
-              <a:solidFill>
-                <a:srgbClr val="660033"/>
-              </a:solidFill>
-              <a:latin typeface="微軟正黑體" pitchFamily="34" charset="-120"/>
-              <a:ea typeface="微軟正黑體" pitchFamily="34" charset="-120"/>
-            </a:endParaRPr>
-          </a:p>
-          <a:p>
-            <a:pPr algn="ctr">
-              <a:buNone/>
-            </a:pPr>
-            <a:r>
-              <a:rPr lang="zh-TW" altLang="en-US" sz="6400" b="1" dirty="0">
-                <a:solidFill>
-                  <a:srgbClr val="660033"/>
-                </a:solidFill>
-                <a:latin typeface="微軟正黑體" pitchFamily="34" charset="-120"/>
-                <a:ea typeface="微軟正黑體" pitchFamily="34" charset="-120"/>
-              </a:rPr>
-              <a:t>每步跟隨主</a:t>
+              <a:t>主要這樣每步引導你</a:t>
             </a:r>
             <a:endParaRPr lang="en-US" altLang="zh-TW" sz="6400" b="1" dirty="0">
               <a:solidFill>
@@ -6168,70 +5320,26 @@
               <a:ea typeface="微軟正黑體" pitchFamily="34" charset="-120"/>
             </a:endParaRPr>
           </a:p>
-        </p:txBody>
-      </p:sp>
-      <p:sp>
-        <p:nvSpPr>
-          <p:cNvPr id="3" name="TextBox 2"/>
-          <p:cNvSpPr txBox="1"/>
-          <p:nvPr/>
-        </p:nvSpPr>
-        <p:spPr>
-          <a:xfrm>
-            <a:off x="0" y="5061182"/>
-            <a:ext cx="12192000" cy="830997"/>
-          </a:xfrm>
-          <a:prstGeom prst="rect">
-            <a:avLst/>
-          </a:prstGeom>
-          <a:noFill/>
-        </p:spPr>
-        <p:txBody>
-          <a:bodyPr wrap="square" rtlCol="0">
-            <a:spAutoFit/>
-          </a:bodyPr>
-          <a:lstStyle/>
-          <a:p>
-            <a:pPr algn="ctr"/>
-            <a:r>
-              <a:rPr lang="en-US" sz="4800" b="1" dirty="0">
-                <a:solidFill>
-                  <a:srgbClr val="660033"/>
-                </a:solidFill>
-                <a:effectLst/>
-                <a:latin typeface="Microsoft JhengHei" panose="020B0604030504040204" pitchFamily="34" charset="-120"/>
-                <a:ea typeface="Microsoft JhengHei" panose="020B0604030504040204" pitchFamily="34" charset="-120"/>
-              </a:rPr>
-              <a:t>( </a:t>
-            </a:r>
-            <a:r>
-              <a:rPr lang="zh-CN" altLang="en-US" sz="4800" b="1" dirty="0">
-                <a:solidFill>
-                  <a:srgbClr val="660033"/>
-                </a:solidFill>
-                <a:effectLst/>
-                <a:latin typeface="Microsoft JhengHei" panose="020B0604030504040204" pitchFamily="34" charset="-120"/>
-                <a:ea typeface="Microsoft JhengHei" panose="020B0604030504040204" pitchFamily="34" charset="-120"/>
-              </a:rPr>
-              <a:t>副</a:t>
-            </a:r>
-            <a:r>
-              <a:rPr lang="en-US" sz="4800" b="1" dirty="0">
-                <a:solidFill>
-                  <a:srgbClr val="660033"/>
-                </a:solidFill>
-                <a:effectLst/>
-                <a:latin typeface="Microsoft JhengHei" panose="020B0604030504040204" pitchFamily="34" charset="-120"/>
-                <a:ea typeface="Microsoft JhengHei" panose="020B0604030504040204" pitchFamily="34" charset="-120"/>
-              </a:rPr>
-              <a:t> )</a:t>
-            </a:r>
-            <a:endParaRPr lang="vi-VN" sz="4800" b="1" dirty="0">
+          <a:p>
+            <a:pPr algn="ctr">
+              <a:buNone/>
+            </a:pPr>
+            <a:r>
+              <a:rPr lang="zh-TW" altLang="en-US" sz="6400" b="1" dirty="0">
+                <a:solidFill>
+                  <a:srgbClr val="660033"/>
+                </a:solidFill>
+                <a:latin typeface="微軟正黑體" pitchFamily="34" charset="-120"/>
+                <a:ea typeface="微軟正黑體" pitchFamily="34" charset="-120"/>
+              </a:rPr>
+              <a:t>每步跟隨主</a:t>
+            </a:r>
+            <a:endParaRPr lang="en-US" altLang="zh-TW" sz="6400" b="1" dirty="0">
               <a:solidFill>
                 <a:srgbClr val="660033"/>
               </a:solidFill>
-              <a:effectLst/>
-              <a:ea typeface="Microsoft JhengHei" panose="020B0604030504040204" pitchFamily="34" charset="-120"/>
+              <a:latin typeface="微軟正黑體" pitchFamily="34" charset="-120"/>
+              <a:ea typeface="微軟正黑體" pitchFamily="34" charset="-120"/>
             </a:endParaRPr>
           </a:p>
         </p:txBody>
@@ -6292,24 +5400,14 @@
               <a:buNone/>
             </a:pPr>
             <a:r>
-              <a:rPr lang="zh-TW" altLang="en-US" sz="6400" b="1" dirty="0" smtClean="0">
+              <a:rPr lang="zh-TW" altLang="en-US" sz="6400" b="1" dirty="0">
                 <a:solidFill>
                   <a:srgbClr val="660033"/>
                 </a:solidFill>
                 <a:latin typeface="微軟正黑體" pitchFamily="34" charset="-120"/>
                 <a:ea typeface="微軟正黑體" pitchFamily="34" charset="-120"/>
               </a:rPr>
-              <a:t>謹</a:t>
-            </a:r>
-            <a:r>
-              <a:rPr lang="zh-TW" altLang="en-US" sz="6400" b="1" dirty="0">
-                <a:solidFill>
-                  <a:srgbClr val="660033"/>
-                </a:solidFill>
-                <a:latin typeface="微軟正黑體" pitchFamily="34" charset="-120"/>
-                <a:ea typeface="微軟正黑體" pitchFamily="34" charset="-120"/>
-              </a:rPr>
-              <a:t>慎踏上每一步</a:t>
+              <a:t>謹慎踏上每一步</a:t>
             </a:r>
             <a:endParaRPr lang="en-US" altLang="zh-TW" sz="6400" b="1" dirty="0">
               <a:solidFill>
@@ -6339,72 +5437,6 @@
               </a:solidFill>
               <a:latin typeface="微軟正黑體" pitchFamily="34" charset="-120"/>
               <a:ea typeface="微軟正黑體" pitchFamily="34" charset="-120"/>
-            </a:endParaRPr>
-          </a:p>
-        </p:txBody>
-      </p:sp>
-      <p:sp>
-        <p:nvSpPr>
-          <p:cNvPr id="3" name="TextBox 2"/>
-          <p:cNvSpPr txBox="1"/>
-          <p:nvPr/>
-        </p:nvSpPr>
-        <p:spPr>
-          <a:xfrm>
-            <a:off x="0" y="5061182"/>
-            <a:ext cx="12192000" cy="830997"/>
-          </a:xfrm>
-          <a:prstGeom prst="rect">
-            <a:avLst/>
-          </a:prstGeom>
-          <a:noFill/>
-        </p:spPr>
-        <p:txBody>
-          <a:bodyPr wrap="square" rtlCol="0">
-            <a:spAutoFit/>
-          </a:bodyPr>
-          <a:lstStyle/>
-          <a:p>
-            <a:pPr algn="ctr"/>
-            <a:r>
-              <a:rPr lang="en-US" sz="4800" b="1" dirty="0">
-                <a:solidFill>
-                  <a:srgbClr val="660033"/>
-                </a:solidFill>
-                <a:effectLst/>
-                <a:latin typeface="Microsoft JhengHei" panose="020B0604030504040204" pitchFamily="34" charset="-120"/>
-                <a:ea typeface="Microsoft JhengHei" panose="020B0604030504040204" pitchFamily="34" charset="-120"/>
-              </a:rPr>
-              <a:t>( </a:t>
-            </a:r>
-            <a:r>
-              <a:rPr lang="zh-CN" altLang="en-US" sz="4800" b="1" dirty="0">
-                <a:solidFill>
-                  <a:srgbClr val="660033"/>
-                </a:solidFill>
-                <a:effectLst/>
-                <a:latin typeface="Microsoft JhengHei" panose="020B0604030504040204" pitchFamily="34" charset="-120"/>
-                <a:ea typeface="Microsoft JhengHei" panose="020B0604030504040204" pitchFamily="34" charset="-120"/>
-              </a:rPr>
-              <a:t>副</a:t>
-            </a:r>
-            <a:r>
-              <a:rPr lang="en-US" sz="4800" b="1" dirty="0">
-                <a:solidFill>
-                  <a:srgbClr val="660033"/>
-                </a:solidFill>
-                <a:effectLst/>
-                <a:latin typeface="Microsoft JhengHei" panose="020B0604030504040204" pitchFamily="34" charset="-120"/>
-                <a:ea typeface="Microsoft JhengHei" panose="020B0604030504040204" pitchFamily="34" charset="-120"/>
-              </a:rPr>
-              <a:t> )</a:t>
-            </a:r>
-            <a:endParaRPr lang="vi-VN" sz="4800" b="1" dirty="0">
-              <a:solidFill>
-                <a:srgbClr val="660033"/>
-              </a:solidFill>
-              <a:effectLst/>
-              <a:ea typeface="Microsoft JhengHei" panose="020B0604030504040204" pitchFamily="34" charset="-120"/>
             </a:endParaRPr>
           </a:p>
         </p:txBody>
@@ -6506,72 +5538,6 @@
           </a:p>
         </p:txBody>
       </p:sp>
-      <p:sp>
-        <p:nvSpPr>
-          <p:cNvPr id="3" name="TextBox 2"/>
-          <p:cNvSpPr txBox="1"/>
-          <p:nvPr/>
-        </p:nvSpPr>
-        <p:spPr>
-          <a:xfrm>
-            <a:off x="0" y="5061182"/>
-            <a:ext cx="12192000" cy="830997"/>
-          </a:xfrm>
-          <a:prstGeom prst="rect">
-            <a:avLst/>
-          </a:prstGeom>
-          <a:noFill/>
-        </p:spPr>
-        <p:txBody>
-          <a:bodyPr wrap="square" rtlCol="0">
-            <a:spAutoFit/>
-          </a:bodyPr>
-          <a:lstStyle/>
-          <a:p>
-            <a:pPr algn="ctr"/>
-            <a:r>
-              <a:rPr lang="en-US" sz="4800" b="1" dirty="0">
-                <a:solidFill>
-                  <a:srgbClr val="660033"/>
-                </a:solidFill>
-                <a:effectLst/>
-                <a:latin typeface="Microsoft JhengHei" panose="020B0604030504040204" pitchFamily="34" charset="-120"/>
-                <a:ea typeface="Microsoft JhengHei" panose="020B0604030504040204" pitchFamily="34" charset="-120"/>
-              </a:rPr>
-              <a:t>( </a:t>
-            </a:r>
-            <a:r>
-              <a:rPr lang="zh-CN" altLang="en-US" sz="4800" b="1" dirty="0">
-                <a:solidFill>
-                  <a:srgbClr val="660033"/>
-                </a:solidFill>
-                <a:effectLst/>
-                <a:latin typeface="Microsoft JhengHei" panose="020B0604030504040204" pitchFamily="34" charset="-120"/>
-                <a:ea typeface="Microsoft JhengHei" panose="020B0604030504040204" pitchFamily="34" charset="-120"/>
-              </a:rPr>
-              <a:t>副</a:t>
-            </a:r>
-            <a:r>
-              <a:rPr lang="en-US" sz="4800" b="1" dirty="0">
-                <a:solidFill>
-                  <a:srgbClr val="660033"/>
-                </a:solidFill>
-                <a:effectLst/>
-                <a:latin typeface="Microsoft JhengHei" panose="020B0604030504040204" pitchFamily="34" charset="-120"/>
-                <a:ea typeface="Microsoft JhengHei" panose="020B0604030504040204" pitchFamily="34" charset="-120"/>
-              </a:rPr>
-              <a:t> )</a:t>
-            </a:r>
-            <a:endParaRPr lang="vi-VN" sz="4800" b="1" dirty="0">
-              <a:solidFill>
-                <a:srgbClr val="660033"/>
-              </a:solidFill>
-              <a:effectLst/>
-              <a:ea typeface="Microsoft JhengHei" panose="020B0604030504040204" pitchFamily="34" charset="-120"/>
-            </a:endParaRPr>
-          </a:p>
-        </p:txBody>
-      </p:sp>
     </p:spTree>
     <p:extLst>
       <p:ext uri="{BB962C8B-B14F-4D97-AF65-F5344CB8AC3E}">
@@ -6699,7 +5665,7 @@
                 </a:solidFill>
                 <a:effectLst/>
               </a:rPr>
-              <a:t>( 2 )</a:t>
+              <a:t>( 2 / 3 )</a:t>
             </a:r>
             <a:endParaRPr lang="vi-VN" sz="4800" b="1" dirty="0">
               <a:solidFill>
